--- a/output_pptx/The_Heart_Of_Worship.pptx
+++ b/output_pptx/The_Heart_Of_Worship.pptx
@@ -3128,23 +3128,23 @@
         </p:nvSpPr>
         <p:spPr>
           <a:xfrm>
-            <a:off x="594360" y="2258568"/>
-            <a:ext cx="11002975" cy="685800"/>
-          </a:xfrm>
-          <a:prstGeom prst="rect">
-            <a:avLst/>
-          </a:prstGeom>
-          <a:noFill/>
-        </p:spPr>
-        <p:txBody>
-          <a:bodyPr wrap="square">
-            <a:spAutoFit/>
-          </a:bodyPr>
-          <a:lstStyle/>
-          <a:p>
-            <a:pPr algn="ctr"/>
-            <a:r>
-              <a:rPr sz="4400" b="1" i="0">
+            <a:off x="640080" y="2052828"/>
+            <a:ext cx="10911535" cy="731520"/>
+          </a:xfrm>
+          <a:prstGeom prst="rect">
+            <a:avLst/>
+          </a:prstGeom>
+          <a:noFill/>
+        </p:spPr>
+        <p:txBody>
+          <a:bodyPr wrap="square">
+            <a:spAutoFit/>
+          </a:bodyPr>
+          <a:lstStyle/>
+          <a:p>
+            <a:pPr algn="ctr"/>
+            <a:r>
+              <a:rPr sz="4800" b="1" i="0">
                 <a:solidFill>
                   <a:srgbClr val="FFFFFF"/>
                 </a:solidFill>
@@ -3163,29 +3163,29 @@
         </p:nvSpPr>
         <p:spPr>
           <a:xfrm>
-            <a:off x="594360" y="2980944"/>
-            <a:ext cx="11002975" cy="347472"/>
-          </a:xfrm>
-          <a:prstGeom prst="rect">
-            <a:avLst/>
-          </a:prstGeom>
-          <a:noFill/>
-        </p:spPr>
-        <p:txBody>
-          <a:bodyPr wrap="square">
-            <a:spAutoFit/>
-          </a:bodyPr>
-          <a:lstStyle/>
-          <a:p>
-            <a:pPr algn="ctr"/>
-            <a:r>
-              <a:rPr sz="2200" b="0" i="1">
-                <a:solidFill>
-                  <a:srgbClr val="8C8C8C"/>
-                </a:solidFill>
-                <a:latin typeface="Arial"/>
-              </a:rPr>
-              <a:t/>
+            <a:off x="640080" y="2985516"/>
+            <a:ext cx="10911535" cy="731520"/>
+          </a:xfrm>
+          <a:prstGeom prst="rect">
+            <a:avLst/>
+          </a:prstGeom>
+          <a:noFill/>
+        </p:spPr>
+        <p:txBody>
+          <a:bodyPr wrap="square">
+            <a:spAutoFit/>
+          </a:bodyPr>
+          <a:lstStyle/>
+          <a:p>
+            <a:pPr algn="ctr"/>
+            <a:r>
+              <a:rPr sz="4800" b="1" i="0">
+                <a:solidFill>
+                  <a:srgbClr val="FFFFFF"/>
+                </a:solidFill>
+                <a:latin typeface="Arial"/>
+              </a:rPr>
+              <a:t>Quando a música para</a:t>
             </a:r>
           </a:p>
         </p:txBody>
@@ -3198,29 +3198,29 @@
         </p:nvSpPr>
         <p:spPr>
           <a:xfrm>
-            <a:off x="594360" y="3529584"/>
-            <a:ext cx="11002975" cy="685800"/>
-          </a:xfrm>
-          <a:prstGeom prst="rect">
-            <a:avLst/>
-          </a:prstGeom>
-          <a:noFill/>
-        </p:spPr>
-        <p:txBody>
-          <a:bodyPr wrap="square">
-            <a:spAutoFit/>
-          </a:bodyPr>
-          <a:lstStyle/>
-          <a:p>
-            <a:pPr algn="ctr"/>
-            <a:r>
-              <a:rPr sz="4400" b="1" i="0">
-                <a:solidFill>
-                  <a:srgbClr val="FFFFFF"/>
-                </a:solidFill>
-                <a:latin typeface="Arial"/>
-              </a:rPr>
-              <a:t>Quando a música para</a:t>
+            <a:off x="640080" y="4128516"/>
+            <a:ext cx="10911535" cy="310896"/>
+          </a:xfrm>
+          <a:prstGeom prst="rect">
+            <a:avLst/>
+          </a:prstGeom>
+          <a:noFill/>
+        </p:spPr>
+        <p:txBody>
+          <a:bodyPr wrap="square">
+            <a:spAutoFit/>
+          </a:bodyPr>
+          <a:lstStyle/>
+          <a:p>
+            <a:pPr algn="ctr"/>
+            <a:r>
+              <a:rPr sz="2000" b="0" i="0">
+                <a:solidFill>
+                  <a:srgbClr val="828282"/>
+                </a:solidFill>
+                <a:latin typeface="Arial"/>
+              </a:rPr>
+              <a:t>ただ 行こう</a:t>
             </a:r>
           </a:p>
         </p:txBody>
@@ -3233,29 +3233,29 @@
         </p:nvSpPr>
         <p:spPr>
           <a:xfrm>
-            <a:off x="594360" y="4251960"/>
-            <a:ext cx="11002975" cy="347472"/>
-          </a:xfrm>
-          <a:prstGeom prst="rect">
-            <a:avLst/>
-          </a:prstGeom>
-          <a:noFill/>
-        </p:spPr>
-        <p:txBody>
-          <a:bodyPr wrap="square">
-            <a:spAutoFit/>
-          </a:bodyPr>
-          <a:lstStyle/>
-          <a:p>
-            <a:pPr algn="ctr"/>
-            <a:r>
-              <a:rPr sz="2200" b="0" i="1">
-                <a:solidFill>
-                  <a:srgbClr val="8C8C8C"/>
-                </a:solidFill>
-                <a:latin typeface="Arial"/>
-              </a:rPr>
-              <a:t/>
+            <a:off x="640080" y="4494276"/>
+            <a:ext cx="10911535" cy="310896"/>
+          </a:xfrm>
+          <a:prstGeom prst="rect">
+            <a:avLst/>
+          </a:prstGeom>
+          <a:noFill/>
+        </p:spPr>
+        <p:txBody>
+          <a:bodyPr wrap="square">
+            <a:spAutoFit/>
+          </a:bodyPr>
+          <a:lstStyle/>
+          <a:p>
+            <a:pPr algn="ctr"/>
+            <a:r>
+              <a:rPr sz="2000" b="0" i="0">
+                <a:solidFill>
+                  <a:srgbClr val="828282"/>
+                </a:solidFill>
+                <a:latin typeface="Arial"/>
+              </a:rPr>
+              <a:t>静 寂 の</a:t>
             </a:r>
           </a:p>
         </p:txBody>
@@ -3294,23 +3294,23 @@
         </p:nvSpPr>
         <p:spPr>
           <a:xfrm>
-            <a:off x="594360" y="1837944"/>
-            <a:ext cx="11002975" cy="685800"/>
-          </a:xfrm>
-          <a:prstGeom prst="rect">
-            <a:avLst/>
-          </a:prstGeom>
-          <a:noFill/>
-        </p:spPr>
-        <p:txBody>
-          <a:bodyPr wrap="square">
-            <a:spAutoFit/>
-          </a:bodyPr>
-          <a:lstStyle/>
-          <a:p>
-            <a:pPr algn="ctr"/>
-            <a:r>
-              <a:rPr sz="4400" b="1" i="0">
+            <a:off x="640080" y="1650492"/>
+            <a:ext cx="10911535" cy="731520"/>
+          </a:xfrm>
+          <a:prstGeom prst="rect">
+            <a:avLst/>
+          </a:prstGeom>
+          <a:noFill/>
+        </p:spPr>
+        <p:txBody>
+          <a:bodyPr wrap="square">
+            <a:spAutoFit/>
+          </a:bodyPr>
+          <a:lstStyle/>
+          <a:p>
+            <a:pPr algn="ctr"/>
+            <a:r>
+              <a:rPr sz="4800" b="1" i="0">
                 <a:solidFill>
                   <a:srgbClr val="FFFFFF"/>
                 </a:solidFill>
@@ -3329,8 +3329,8 @@
         </p:nvSpPr>
         <p:spPr>
           <a:xfrm>
-            <a:off x="594360" y="2560320"/>
-            <a:ext cx="11002975" cy="384048"/>
+            <a:off x="640080" y="2418588"/>
+            <a:ext cx="10911535" cy="365760"/>
           </a:xfrm>
           <a:prstGeom prst="rect">
             <a:avLst/>
@@ -3347,7 +3347,7 @@
             <a:r>
               <a:rPr sz="2400" b="0" i="1">
                 <a:solidFill>
-                  <a:srgbClr val="B4B4B4"/>
+                  <a:srgbClr val="AAAAAA"/>
                 </a:solidFill>
                 <a:latin typeface="Arial"/>
               </a:rPr>
@@ -3364,8 +3364,78 @@
         </p:nvSpPr>
         <p:spPr>
           <a:xfrm>
-            <a:off x="594360" y="2980944"/>
-            <a:ext cx="11002975" cy="347472"/>
+            <a:off x="640080" y="2985516"/>
+            <a:ext cx="10911535" cy="731520"/>
+          </a:xfrm>
+          <a:prstGeom prst="rect">
+            <a:avLst/>
+          </a:prstGeom>
+          <a:noFill/>
+        </p:spPr>
+        <p:txBody>
+          <a:bodyPr wrap="square">
+            <a:spAutoFit/>
+          </a:bodyPr>
+          <a:lstStyle/>
+          <a:p>
+            <a:pPr algn="ctr"/>
+            <a:r>
+              <a:rPr sz="4800" b="1" i="0">
+                <a:solidFill>
+                  <a:srgbClr val="FFFFFF"/>
+                </a:solidFill>
+                <a:latin typeface="Arial"/>
+              </a:rPr>
+              <a:t>帰ります</a:t>
+            </a:r>
+          </a:p>
+        </p:txBody>
+      </p:sp>
+      <p:sp>
+        <p:nvSpPr>
+          <p:cNvPr id="5" name="TextBox 4"/>
+          <p:cNvSpPr txBox="1"/>
+          <p:nvPr/>
+        </p:nvSpPr>
+        <p:spPr>
+          <a:xfrm>
+            <a:off x="640080" y="3753612"/>
+            <a:ext cx="10911535" cy="365760"/>
+          </a:xfrm>
+          <a:prstGeom prst="rect">
+            <a:avLst/>
+          </a:prstGeom>
+          <a:noFill/>
+        </p:spPr>
+        <p:txBody>
+          <a:bodyPr wrap="square">
+            <a:spAutoFit/>
+          </a:bodyPr>
+          <a:lstStyle/>
+          <a:p>
+            <a:pPr algn="ctr"/>
+            <a:r>
+              <a:rPr sz="2400" b="0" i="1">
+                <a:solidFill>
+                  <a:srgbClr val="AAAAAA"/>
+                </a:solidFill>
+                <a:latin typeface="Arial"/>
+              </a:rPr>
+              <a:t>Kaerimasu</a:t>
+            </a:r>
+          </a:p>
+        </p:txBody>
+      </p:sp>
+      <p:sp>
+        <p:nvSpPr>
+          <p:cNvPr id="6" name="TextBox 5"/>
+          <p:cNvSpPr txBox="1"/>
+          <p:nvPr/>
+        </p:nvSpPr>
+        <p:spPr>
+          <a:xfrm>
+            <a:off x="640080" y="4530852"/>
+            <a:ext cx="10911535" cy="310896"/>
           </a:xfrm>
           <a:prstGeom prst="rect">
             <a:avLst/>
@@ -3382,81 +3452,11 @@
             <a:r>
               <a:rPr sz="2000" b="0" i="1">
                 <a:solidFill>
-                  <a:srgbClr val="8C8C8C"/>
-                </a:solidFill>
-                <a:latin typeface="Arial"/>
-              </a:rPr>
-              <a:t/>
-            </a:r>
-          </a:p>
-        </p:txBody>
-      </p:sp>
-      <p:sp>
-        <p:nvSpPr>
-          <p:cNvPr id="5" name="TextBox 4"/>
-          <p:cNvSpPr txBox="1"/>
-          <p:nvPr/>
-        </p:nvSpPr>
-        <p:spPr>
-          <a:xfrm>
-            <a:off x="594360" y="3529584"/>
-            <a:ext cx="11002975" cy="685800"/>
-          </a:xfrm>
-          <a:prstGeom prst="rect">
-            <a:avLst/>
-          </a:prstGeom>
-          <a:noFill/>
-        </p:spPr>
-        <p:txBody>
-          <a:bodyPr wrap="square">
-            <a:spAutoFit/>
-          </a:bodyPr>
-          <a:lstStyle/>
-          <a:p>
-            <a:pPr algn="ctr"/>
-            <a:r>
-              <a:rPr sz="4400" b="1" i="0">
-                <a:solidFill>
-                  <a:srgbClr val="FFFFFF"/>
-                </a:solidFill>
-                <a:latin typeface="Arial"/>
-              </a:rPr>
-              <a:t>帰ります</a:t>
-            </a:r>
-          </a:p>
-        </p:txBody>
-      </p:sp>
-      <p:sp>
-        <p:nvSpPr>
-          <p:cNvPr id="6" name="TextBox 5"/>
-          <p:cNvSpPr txBox="1"/>
-          <p:nvPr/>
-        </p:nvSpPr>
-        <p:spPr>
-          <a:xfrm>
-            <a:off x="594360" y="4251960"/>
-            <a:ext cx="11002975" cy="384048"/>
-          </a:xfrm>
-          <a:prstGeom prst="rect">
-            <a:avLst/>
-          </a:prstGeom>
-          <a:noFill/>
-        </p:spPr>
-        <p:txBody>
-          <a:bodyPr wrap="square">
-            <a:spAutoFit/>
-          </a:bodyPr>
-          <a:lstStyle/>
-          <a:p>
-            <a:pPr algn="ctr"/>
-            <a:r>
-              <a:rPr sz="2400" b="0" i="1">
-                <a:solidFill>
-                  <a:srgbClr val="B4B4B4"/>
-                </a:solidFill>
-                <a:latin typeface="Arial"/>
-              </a:rPr>
-              <a:t>Kaerimasu</a:t>
+                  <a:srgbClr val="828282"/>
+                </a:solidFill>
+                <a:latin typeface="Arial"/>
+              </a:rPr>
+              <a:t>Estás a olhar para o meu coração</a:t>
             </a:r>
           </a:p>
         </p:txBody>
@@ -3469,8 +3469,8 @@
         </p:nvSpPr>
         <p:spPr>
           <a:xfrm>
-            <a:off x="594360" y="4672584"/>
-            <a:ext cx="11002975" cy="347472"/>
+            <a:off x="640080" y="4896612"/>
+            <a:ext cx="10911535" cy="310896"/>
           </a:xfrm>
           <a:prstGeom prst="rect">
             <a:avLst/>
@@ -3487,11 +3487,11 @@
             <a:r>
               <a:rPr sz="2000" b="0" i="1">
                 <a:solidFill>
-                  <a:srgbClr val="8C8C8C"/>
-                </a:solidFill>
-                <a:latin typeface="Arial"/>
-              </a:rPr>
-              <a:t/>
+                  <a:srgbClr val="828282"/>
+                </a:solidFill>
+                <a:latin typeface="Arial"/>
+              </a:rPr>
+              <a:t>Estou voltando ao coração da adoração</a:t>
             </a:r>
           </a:p>
         </p:txBody>
@@ -3530,23 +3530,23 @@
         </p:nvSpPr>
         <p:spPr>
           <a:xfrm>
-            <a:off x="594360" y="1837944"/>
-            <a:ext cx="11002975" cy="685800"/>
-          </a:xfrm>
-          <a:prstGeom prst="rect">
-            <a:avLst/>
-          </a:prstGeom>
-          <a:noFill/>
-        </p:spPr>
-        <p:txBody>
-          <a:bodyPr wrap="square">
-            <a:spAutoFit/>
-          </a:bodyPr>
-          <a:lstStyle/>
-          <a:p>
-            <a:pPr algn="ctr"/>
-            <a:r>
-              <a:rPr sz="4400" b="1" i="0">
+            <a:off x="640080" y="1650492"/>
+            <a:ext cx="10911535" cy="731520"/>
+          </a:xfrm>
+          <a:prstGeom prst="rect">
+            <a:avLst/>
+          </a:prstGeom>
+          <a:noFill/>
+        </p:spPr>
+        <p:txBody>
+          <a:bodyPr wrap="square">
+            <a:spAutoFit/>
+          </a:bodyPr>
+          <a:lstStyle/>
+          <a:p>
+            <a:pPr algn="ctr"/>
+            <a:r>
+              <a:rPr sz="4800" b="1" i="0">
                 <a:solidFill>
                   <a:srgbClr val="FFFFFF"/>
                 </a:solidFill>
@@ -3565,8 +3565,8 @@
         </p:nvSpPr>
         <p:spPr>
           <a:xfrm>
-            <a:off x="594360" y="2560320"/>
-            <a:ext cx="11002975" cy="384048"/>
+            <a:off x="640080" y="2418588"/>
+            <a:ext cx="10911535" cy="365760"/>
           </a:xfrm>
           <a:prstGeom prst="rect">
             <a:avLst/>
@@ -3583,7 +3583,7 @@
             <a:r>
               <a:rPr sz="2400" b="0" i="1">
                 <a:solidFill>
-                  <a:srgbClr val="B4B4B4"/>
+                  <a:srgbClr val="AAAAAA"/>
                 </a:solidFill>
                 <a:latin typeface="Arial"/>
               </a:rPr>
@@ -3600,8 +3600,78 @@
         </p:nvSpPr>
         <p:spPr>
           <a:xfrm>
-            <a:off x="594360" y="2980944"/>
-            <a:ext cx="11002975" cy="347472"/>
+            <a:off x="640080" y="2985516"/>
+            <a:ext cx="10911535" cy="731520"/>
+          </a:xfrm>
+          <a:prstGeom prst="rect">
+            <a:avLst/>
+          </a:prstGeom>
+          <a:noFill/>
+        </p:spPr>
+        <p:txBody>
+          <a:bodyPr wrap="square">
+            <a:spAutoFit/>
+          </a:bodyPr>
+          <a:lstStyle/>
+          <a:p>
+            <a:pPr algn="ctr"/>
+            <a:r>
+              <a:rPr sz="4800" b="1" i="0">
+                <a:solidFill>
+                  <a:srgbClr val="FFFFFF"/>
+                </a:solidFill>
+                <a:latin typeface="Arial"/>
+              </a:rPr>
+              <a:t>勝手な 自分 捨てて</a:t>
+            </a:r>
+          </a:p>
+        </p:txBody>
+      </p:sp>
+      <p:sp>
+        <p:nvSpPr>
+          <p:cNvPr id="5" name="TextBox 4"/>
+          <p:cNvSpPr txBox="1"/>
+          <p:nvPr/>
+        </p:nvSpPr>
+        <p:spPr>
+          <a:xfrm>
+            <a:off x="640080" y="3753612"/>
+            <a:ext cx="10911535" cy="365760"/>
+          </a:xfrm>
+          <a:prstGeom prst="rect">
+            <a:avLst/>
+          </a:prstGeom>
+          <a:noFill/>
+        </p:spPr>
+        <p:txBody>
+          <a:bodyPr wrap="square">
+            <a:spAutoFit/>
+          </a:bodyPr>
+          <a:lstStyle/>
+          <a:p>
+            <a:pPr algn="ctr"/>
+            <a:r>
+              <a:rPr sz="2400" b="0" i="1">
+                <a:solidFill>
+                  <a:srgbClr val="AAAAAA"/>
+                </a:solidFill>
+                <a:latin typeface="Arial"/>
+              </a:rPr>
+              <a:t>Katte na jibun sutete</a:t>
+            </a:r>
+          </a:p>
+        </p:txBody>
+      </p:sp>
+      <p:sp>
+        <p:nvSpPr>
+          <p:cNvPr id="6" name="TextBox 5"/>
+          <p:cNvSpPr txBox="1"/>
+          <p:nvPr/>
+        </p:nvSpPr>
+        <p:spPr>
+          <a:xfrm>
+            <a:off x="640080" y="4530852"/>
+            <a:ext cx="10911535" cy="310896"/>
           </a:xfrm>
           <a:prstGeom prst="rect">
             <a:avLst/>
@@ -3618,81 +3688,11 @@
             <a:r>
               <a:rPr sz="2000" b="0" i="1">
                 <a:solidFill>
-                  <a:srgbClr val="8C8C8C"/>
-                </a:solidFill>
-                <a:latin typeface="Arial"/>
-              </a:rPr>
-              <a:t/>
-            </a:r>
-          </a:p>
-        </p:txBody>
-      </p:sp>
-      <p:sp>
-        <p:nvSpPr>
-          <p:cNvPr id="5" name="TextBox 4"/>
-          <p:cNvSpPr txBox="1"/>
-          <p:nvPr/>
-        </p:nvSpPr>
-        <p:spPr>
-          <a:xfrm>
-            <a:off x="594360" y="3529584"/>
-            <a:ext cx="11002975" cy="685800"/>
-          </a:xfrm>
-          <a:prstGeom prst="rect">
-            <a:avLst/>
-          </a:prstGeom>
-          <a:noFill/>
-        </p:spPr>
-        <p:txBody>
-          <a:bodyPr wrap="square">
-            <a:spAutoFit/>
-          </a:bodyPr>
-          <a:lstStyle/>
-          <a:p>
-            <a:pPr algn="ctr"/>
-            <a:r>
-              <a:rPr sz="4400" b="1" i="0">
-                <a:solidFill>
-                  <a:srgbClr val="FFFFFF"/>
-                </a:solidFill>
-                <a:latin typeface="Arial"/>
-              </a:rPr>
-              <a:t>勝手な 自分 捨てて</a:t>
-            </a:r>
-          </a:p>
-        </p:txBody>
-      </p:sp>
-      <p:sp>
-        <p:nvSpPr>
-          <p:cNvPr id="6" name="TextBox 5"/>
-          <p:cNvSpPr txBox="1"/>
-          <p:nvPr/>
-        </p:nvSpPr>
-        <p:spPr>
-          <a:xfrm>
-            <a:off x="594360" y="4251960"/>
-            <a:ext cx="11002975" cy="384048"/>
-          </a:xfrm>
-          <a:prstGeom prst="rect">
-            <a:avLst/>
-          </a:prstGeom>
-          <a:noFill/>
-        </p:spPr>
-        <p:txBody>
-          <a:bodyPr wrap="square">
-            <a:spAutoFit/>
-          </a:bodyPr>
-          <a:lstStyle/>
-          <a:p>
-            <a:pPr algn="ctr"/>
-            <a:r>
-              <a:rPr sz="2400" b="0" i="1">
-                <a:solidFill>
-                  <a:srgbClr val="B4B4B4"/>
-                </a:solidFill>
-                <a:latin typeface="Arial"/>
-              </a:rPr>
-              <a:t>Katte na jibun sutete</a:t>
+                  <a:srgbClr val="828282"/>
+                </a:solidFill>
+                <a:latin typeface="Arial"/>
+              </a:rPr>
+              <a:t>E é tudo sobre Ti</a:t>
             </a:r>
           </a:p>
         </p:txBody>
@@ -3705,8 +3705,8 @@
         </p:nvSpPr>
         <p:spPr>
           <a:xfrm>
-            <a:off x="594360" y="4672584"/>
-            <a:ext cx="11002975" cy="347472"/>
+            <a:off x="640080" y="4896612"/>
+            <a:ext cx="10911535" cy="310896"/>
           </a:xfrm>
           <a:prstGeom prst="rect">
             <a:avLst/>
@@ -3723,11 +3723,11 @@
             <a:r>
               <a:rPr sz="2000" b="0" i="1">
                 <a:solidFill>
-                  <a:srgbClr val="8C8C8C"/>
-                </a:solidFill>
-                <a:latin typeface="Arial"/>
-              </a:rPr>
-              <a:t/>
+                  <a:srgbClr val="828282"/>
+                </a:solidFill>
+                <a:latin typeface="Arial"/>
+              </a:rPr>
+              <a:t>Tudo sobre Ti, Jesus</a:t>
             </a:r>
           </a:p>
         </p:txBody>
@@ -3766,23 +3766,23 @@
         </p:nvSpPr>
         <p:spPr>
           <a:xfrm>
-            <a:off x="594360" y="1837944"/>
-            <a:ext cx="11002975" cy="685800"/>
-          </a:xfrm>
-          <a:prstGeom prst="rect">
-            <a:avLst/>
-          </a:prstGeom>
-          <a:noFill/>
-        </p:spPr>
-        <p:txBody>
-          <a:bodyPr wrap="square">
-            <a:spAutoFit/>
-          </a:bodyPr>
-          <a:lstStyle/>
-          <a:p>
-            <a:pPr algn="ctr"/>
-            <a:r>
-              <a:rPr sz="4400" b="1" i="0">
+            <a:off x="640080" y="1650492"/>
+            <a:ext cx="10911535" cy="731520"/>
+          </a:xfrm>
+          <a:prstGeom prst="rect">
+            <a:avLst/>
+          </a:prstGeom>
+          <a:noFill/>
+        </p:spPr>
+        <p:txBody>
+          <a:bodyPr wrap="square">
+            <a:spAutoFit/>
+          </a:bodyPr>
+          <a:lstStyle/>
+          <a:p>
+            <a:pPr algn="ctr"/>
+            <a:r>
+              <a:rPr sz="4800" b="1" i="0">
                 <a:solidFill>
                   <a:srgbClr val="FFFFFF"/>
                 </a:solidFill>
@@ -3801,8 +3801,8 @@
         </p:nvSpPr>
         <p:spPr>
           <a:xfrm>
-            <a:off x="594360" y="2560320"/>
-            <a:ext cx="11002975" cy="384048"/>
+            <a:off x="640080" y="2418588"/>
+            <a:ext cx="10911535" cy="365760"/>
           </a:xfrm>
           <a:prstGeom prst="rect">
             <a:avLst/>
@@ -3819,7 +3819,7 @@
             <a:r>
               <a:rPr sz="2400" b="0" i="1">
                 <a:solidFill>
-                  <a:srgbClr val="B4B4B4"/>
+                  <a:srgbClr val="AAAAAA"/>
                 </a:solidFill>
                 <a:latin typeface="Arial"/>
               </a:rPr>
@@ -3836,8 +3836,78 @@
         </p:nvSpPr>
         <p:spPr>
           <a:xfrm>
-            <a:off x="594360" y="2980944"/>
-            <a:ext cx="11002975" cy="347472"/>
+            <a:off x="640080" y="2985516"/>
+            <a:ext cx="10911535" cy="731520"/>
+          </a:xfrm>
+          <a:prstGeom prst="rect">
+            <a:avLst/>
+          </a:prstGeom>
+          <a:noFill/>
+        </p:spPr>
+        <p:txBody>
+          <a:bodyPr wrap="square">
+            <a:spAutoFit/>
+          </a:bodyPr>
+          <a:lstStyle/>
+          <a:p>
+            <a:pPr algn="ctr"/>
+            <a:r>
+              <a:rPr sz="4800" b="1" i="0">
+                <a:solidFill>
+                  <a:srgbClr val="FFFFFF"/>
+                </a:solidFill>
+                <a:latin typeface="Arial"/>
+              </a:rPr>
+              <a:t>主イエス あ な た へ</a:t>
+            </a:r>
+          </a:p>
+        </p:txBody>
+      </p:sp>
+      <p:sp>
+        <p:nvSpPr>
+          <p:cNvPr id="5" name="TextBox 4"/>
+          <p:cNvSpPr txBox="1"/>
+          <p:nvPr/>
+        </p:nvSpPr>
+        <p:spPr>
+          <a:xfrm>
+            <a:off x="640080" y="3753612"/>
+            <a:ext cx="10911535" cy="365760"/>
+          </a:xfrm>
+          <a:prstGeom prst="rect">
+            <a:avLst/>
+          </a:prstGeom>
+          <a:noFill/>
+        </p:spPr>
+        <p:txBody>
+          <a:bodyPr wrap="square">
+            <a:spAutoFit/>
+          </a:bodyPr>
+          <a:lstStyle/>
+          <a:p>
+            <a:pPr algn="ctr"/>
+            <a:r>
+              <a:rPr sz="2400" b="0" i="1">
+                <a:solidFill>
+                  <a:srgbClr val="AAAAAA"/>
+                </a:solidFill>
+                <a:latin typeface="Arial"/>
+              </a:rPr>
+              <a:t>Shu Iesu anata e</a:t>
+            </a:r>
+          </a:p>
+        </p:txBody>
+      </p:sp>
+      <p:sp>
+        <p:nvSpPr>
+          <p:cNvPr id="6" name="TextBox 5"/>
+          <p:cNvSpPr txBox="1"/>
+          <p:nvPr/>
+        </p:nvSpPr>
+        <p:spPr>
+          <a:xfrm>
+            <a:off x="640080" y="4530852"/>
+            <a:ext cx="10911535" cy="310896"/>
           </a:xfrm>
           <a:prstGeom prst="rect">
             <a:avLst/>
@@ -3854,81 +3924,11 @@
             <a:r>
               <a:rPr sz="2000" b="0" i="1">
                 <a:solidFill>
-                  <a:srgbClr val="8C8C8C"/>
-                </a:solidFill>
-                <a:latin typeface="Arial"/>
-              </a:rPr>
-              <a:t/>
-            </a:r>
-          </a:p>
-        </p:txBody>
-      </p:sp>
-      <p:sp>
-        <p:nvSpPr>
-          <p:cNvPr id="5" name="TextBox 4"/>
-          <p:cNvSpPr txBox="1"/>
-          <p:nvPr/>
-        </p:nvSpPr>
-        <p:spPr>
-          <a:xfrm>
-            <a:off x="594360" y="3529584"/>
-            <a:ext cx="11002975" cy="685800"/>
-          </a:xfrm>
-          <a:prstGeom prst="rect">
-            <a:avLst/>
-          </a:prstGeom>
-          <a:noFill/>
-        </p:spPr>
-        <p:txBody>
-          <a:bodyPr wrap="square">
-            <a:spAutoFit/>
-          </a:bodyPr>
-          <a:lstStyle/>
-          <a:p>
-            <a:pPr algn="ctr"/>
-            <a:r>
-              <a:rPr sz="4400" b="1" i="0">
-                <a:solidFill>
-                  <a:srgbClr val="FFFFFF"/>
-                </a:solidFill>
-                <a:latin typeface="Arial"/>
-              </a:rPr>
-              <a:t>主イエス あ な た へ</a:t>
-            </a:r>
-          </a:p>
-        </p:txBody>
-      </p:sp>
-      <p:sp>
-        <p:nvSpPr>
-          <p:cNvPr id="6" name="TextBox 5"/>
-          <p:cNvSpPr txBox="1"/>
-          <p:nvPr/>
-        </p:nvSpPr>
-        <p:spPr>
-          <a:xfrm>
-            <a:off x="594360" y="4251960"/>
-            <a:ext cx="11002975" cy="384048"/>
-          </a:xfrm>
-          <a:prstGeom prst="rect">
-            <a:avLst/>
-          </a:prstGeom>
-          <a:noFill/>
-        </p:spPr>
-        <p:txBody>
-          <a:bodyPr wrap="square">
-            <a:spAutoFit/>
-          </a:bodyPr>
-          <a:lstStyle/>
-          <a:p>
-            <a:pPr algn="ctr"/>
-            <a:r>
-              <a:rPr sz="2400" b="0" i="1">
-                <a:solidFill>
-                  <a:srgbClr val="B4B4B4"/>
-                </a:solidFill>
-                <a:latin typeface="Arial"/>
-              </a:rPr>
-              <a:t>Shu Iesu anata e</a:t>
+                  <a:srgbClr val="828282"/>
+                </a:solidFill>
+                <a:latin typeface="Arial"/>
+              </a:rPr>
+              <a:t>Perdoa-me, Senhor, pelo que fiz</a:t>
             </a:r>
           </a:p>
         </p:txBody>
@@ -3941,8 +3941,8 @@
         </p:nvSpPr>
         <p:spPr>
           <a:xfrm>
-            <a:off x="594360" y="4672584"/>
-            <a:ext cx="11002975" cy="347472"/>
+            <a:off x="640080" y="4896612"/>
+            <a:ext cx="10911535" cy="310896"/>
           </a:xfrm>
           <a:prstGeom prst="rect">
             <a:avLst/>
@@ -3959,11 +3959,11 @@
             <a:r>
               <a:rPr sz="2000" b="0" i="1">
                 <a:solidFill>
-                  <a:srgbClr val="8C8C8C"/>
-                </a:solidFill>
-                <a:latin typeface="Arial"/>
-              </a:rPr>
-              <a:t/>
+                  <a:srgbClr val="828282"/>
+                </a:solidFill>
+                <a:latin typeface="Arial"/>
+              </a:rPr>
+              <a:t>Quando não era tudo sobre Ti</a:t>
             </a:r>
           </a:p>
         </p:txBody>
@@ -4002,23 +4002,23 @@
         </p:nvSpPr>
         <p:spPr>
           <a:xfrm>
-            <a:off x="594360" y="1837944"/>
-            <a:ext cx="11002975" cy="685800"/>
-          </a:xfrm>
-          <a:prstGeom prst="rect">
-            <a:avLst/>
-          </a:prstGeom>
-          <a:noFill/>
-        </p:spPr>
-        <p:txBody>
-          <a:bodyPr wrap="square">
-            <a:spAutoFit/>
-          </a:bodyPr>
-          <a:lstStyle/>
-          <a:p>
-            <a:pPr algn="ctr"/>
-            <a:r>
-              <a:rPr sz="4400" b="1" i="0">
+            <a:off x="640080" y="1650492"/>
+            <a:ext cx="10911535" cy="731520"/>
+          </a:xfrm>
+          <a:prstGeom prst="rect">
+            <a:avLst/>
+          </a:prstGeom>
+          <a:noFill/>
+        </p:spPr>
+        <p:txBody>
+          <a:bodyPr wrap="square">
+            <a:spAutoFit/>
+          </a:bodyPr>
+          <a:lstStyle/>
+          <a:p>
+            <a:pPr algn="ctr"/>
+            <a:r>
+              <a:rPr sz="4800" b="1" i="0">
                 <a:solidFill>
                   <a:srgbClr val="FFFFFF"/>
                 </a:solidFill>
@@ -4037,8 +4037,8 @@
         </p:nvSpPr>
         <p:spPr>
           <a:xfrm>
-            <a:off x="594360" y="2560320"/>
-            <a:ext cx="11002975" cy="384048"/>
+            <a:off x="640080" y="2418588"/>
+            <a:ext cx="10911535" cy="365760"/>
           </a:xfrm>
           <a:prstGeom prst="rect">
             <a:avLst/>
@@ -4055,7 +4055,7 @@
             <a:r>
               <a:rPr sz="2400" b="0" i="1">
                 <a:solidFill>
-                  <a:srgbClr val="B4B4B4"/>
+                  <a:srgbClr val="AAAAAA"/>
                 </a:solidFill>
                 <a:latin typeface="Arial"/>
               </a:rPr>
@@ -4072,8 +4072,78 @@
         </p:nvSpPr>
         <p:spPr>
           <a:xfrm>
-            <a:off x="594360" y="2980944"/>
-            <a:ext cx="11002975" cy="347472"/>
+            <a:off x="640080" y="2985516"/>
+            <a:ext cx="10911535" cy="731520"/>
+          </a:xfrm>
+          <a:prstGeom prst="rect">
+            <a:avLst/>
+          </a:prstGeom>
+          <a:noFill/>
+        </p:spPr>
+        <p:txBody>
+          <a:bodyPr wrap="square">
+            <a:spAutoFit/>
+          </a:bodyPr>
+          <a:lstStyle/>
+          <a:p>
+            <a:pPr algn="ctr"/>
+            <a:r>
+              <a:rPr sz="4800" b="1" i="0">
+                <a:solidFill>
+                  <a:srgbClr val="FFFFFF"/>
+                </a:solidFill>
+                <a:latin typeface="Arial"/>
+              </a:rPr>
+              <a:t>王なる主</a:t>
+            </a:r>
+          </a:p>
+        </p:txBody>
+      </p:sp>
+      <p:sp>
+        <p:nvSpPr>
+          <p:cNvPr id="5" name="TextBox 4"/>
+          <p:cNvSpPr txBox="1"/>
+          <p:nvPr/>
+        </p:nvSpPr>
+        <p:spPr>
+          <a:xfrm>
+            <a:off x="640080" y="3753612"/>
+            <a:ext cx="10911535" cy="365760"/>
+          </a:xfrm>
+          <a:prstGeom prst="rect">
+            <a:avLst/>
+          </a:prstGeom>
+          <a:noFill/>
+        </p:spPr>
+        <p:txBody>
+          <a:bodyPr wrap="square">
+            <a:spAutoFit/>
+          </a:bodyPr>
+          <a:lstStyle/>
+          <a:p>
+            <a:pPr algn="ctr"/>
+            <a:r>
+              <a:rPr sz="2400" b="0" i="1">
+                <a:solidFill>
+                  <a:srgbClr val="AAAAAA"/>
+                </a:solidFill>
+                <a:latin typeface="Arial"/>
+              </a:rPr>
+              <a:t>ou naru shu</a:t>
+            </a:r>
+          </a:p>
+        </p:txBody>
+      </p:sp>
+      <p:sp>
+        <p:nvSpPr>
+          <p:cNvPr id="6" name="TextBox 5"/>
+          <p:cNvSpPr txBox="1"/>
+          <p:nvPr/>
+        </p:nvSpPr>
+        <p:spPr>
+          <a:xfrm>
+            <a:off x="640080" y="4530852"/>
+            <a:ext cx="10911535" cy="310896"/>
           </a:xfrm>
           <a:prstGeom prst="rect">
             <a:avLst/>
@@ -4090,81 +4160,11 @@
             <a:r>
               <a:rPr sz="2000" b="0" i="1">
                 <a:solidFill>
-                  <a:srgbClr val="8C8C8C"/>
-                </a:solidFill>
-                <a:latin typeface="Arial"/>
-              </a:rPr>
-              <a:t/>
-            </a:r>
-          </a:p>
-        </p:txBody>
-      </p:sp>
-      <p:sp>
-        <p:nvSpPr>
-          <p:cNvPr id="5" name="TextBox 4"/>
-          <p:cNvSpPr txBox="1"/>
-          <p:nvPr/>
-        </p:nvSpPr>
-        <p:spPr>
-          <a:xfrm>
-            <a:off x="594360" y="3529584"/>
-            <a:ext cx="11002975" cy="685800"/>
-          </a:xfrm>
-          <a:prstGeom prst="rect">
-            <a:avLst/>
-          </a:prstGeom>
-          <a:noFill/>
-        </p:spPr>
-        <p:txBody>
-          <a:bodyPr wrap="square">
-            <a:spAutoFit/>
-          </a:bodyPr>
-          <a:lstStyle/>
-          <a:p>
-            <a:pPr algn="ctr"/>
-            <a:r>
-              <a:rPr sz="4400" b="1" i="0">
-                <a:solidFill>
-                  <a:srgbClr val="FFFFFF"/>
-                </a:solidFill>
-                <a:latin typeface="Arial"/>
-              </a:rPr>
-              <a:t>王なる主</a:t>
-            </a:r>
-          </a:p>
-        </p:txBody>
-      </p:sp>
-      <p:sp>
-        <p:nvSpPr>
-          <p:cNvPr id="6" name="TextBox 5"/>
-          <p:cNvSpPr txBox="1"/>
-          <p:nvPr/>
-        </p:nvSpPr>
-        <p:spPr>
-          <a:xfrm>
-            <a:off x="594360" y="4251960"/>
-            <a:ext cx="11002975" cy="384048"/>
-          </a:xfrm>
-          <a:prstGeom prst="rect">
-            <a:avLst/>
-          </a:prstGeom>
-          <a:noFill/>
-        </p:spPr>
-        <p:txBody>
-          <a:bodyPr wrap="square">
-            <a:spAutoFit/>
-          </a:bodyPr>
-          <a:lstStyle/>
-          <a:p>
-            <a:pPr algn="ctr"/>
-            <a:r>
-              <a:rPr sz="2400" b="0" i="1">
-                <a:solidFill>
-                  <a:srgbClr val="B4B4B4"/>
-                </a:solidFill>
-                <a:latin typeface="Arial"/>
-              </a:rPr>
-              <a:t>ou naru shu</a:t>
+                  <a:srgbClr val="828282"/>
+                </a:solidFill>
+                <a:latin typeface="Arial"/>
+              </a:rPr>
+              <a:t>Ninguém poderia expressar</a:t>
             </a:r>
           </a:p>
         </p:txBody>
@@ -4177,8 +4177,8 @@
         </p:nvSpPr>
         <p:spPr>
           <a:xfrm>
-            <a:off x="594360" y="4672584"/>
-            <a:ext cx="11002975" cy="347472"/>
+            <a:off x="640080" y="4896612"/>
+            <a:ext cx="10911535" cy="310896"/>
           </a:xfrm>
           <a:prstGeom prst="rect">
             <a:avLst/>
@@ -4195,11 +4195,11 @@
             <a:r>
               <a:rPr sz="2000" b="0" i="1">
                 <a:solidFill>
-                  <a:srgbClr val="8C8C8C"/>
-                </a:solidFill>
-                <a:latin typeface="Arial"/>
-              </a:rPr>
-              <a:t/>
+                  <a:srgbClr val="828282"/>
+                </a:solidFill>
+                <a:latin typeface="Arial"/>
+              </a:rPr>
+              <a:t>Quanto Tu mereces</a:t>
             </a:r>
           </a:p>
         </p:txBody>
@@ -4238,23 +4238,23 @@
         </p:nvSpPr>
         <p:spPr>
           <a:xfrm>
-            <a:off x="594360" y="1837944"/>
-            <a:ext cx="11002975" cy="685800"/>
-          </a:xfrm>
-          <a:prstGeom prst="rect">
-            <a:avLst/>
-          </a:prstGeom>
-          <a:noFill/>
-        </p:spPr>
-        <p:txBody>
-          <a:bodyPr wrap="square">
-            <a:spAutoFit/>
-          </a:bodyPr>
-          <a:lstStyle/>
-          <a:p>
-            <a:pPr algn="ctr"/>
-            <a:r>
-              <a:rPr sz="4400" b="1" i="0">
+            <a:off x="640080" y="1650492"/>
+            <a:ext cx="10911535" cy="731520"/>
+          </a:xfrm>
+          <a:prstGeom prst="rect">
+            <a:avLst/>
+          </a:prstGeom>
+          <a:noFill/>
+        </p:spPr>
+        <p:txBody>
+          <a:bodyPr wrap="square">
+            <a:spAutoFit/>
+          </a:bodyPr>
+          <a:lstStyle/>
+          <a:p>
+            <a:pPr algn="ctr"/>
+            <a:r>
+              <a:rPr sz="4800" b="1" i="0">
                 <a:solidFill>
                   <a:srgbClr val="FFFFFF"/>
                 </a:solidFill>
@@ -4273,8 +4273,8 @@
         </p:nvSpPr>
         <p:spPr>
           <a:xfrm>
-            <a:off x="594360" y="2560320"/>
-            <a:ext cx="11002975" cy="384048"/>
+            <a:off x="640080" y="2418588"/>
+            <a:ext cx="10911535" cy="365760"/>
           </a:xfrm>
           <a:prstGeom prst="rect">
             <a:avLst/>
@@ -4291,7 +4291,7 @@
             <a:r>
               <a:rPr sz="2400" b="0" i="1">
                 <a:solidFill>
-                  <a:srgbClr val="B4B4B4"/>
+                  <a:srgbClr val="AAAAAA"/>
                 </a:solidFill>
                 <a:latin typeface="Arial"/>
               </a:rPr>
@@ -4308,8 +4308,78 @@
         </p:nvSpPr>
         <p:spPr>
           <a:xfrm>
-            <a:off x="594360" y="2980944"/>
-            <a:ext cx="11002975" cy="347472"/>
+            <a:off x="640080" y="2985516"/>
+            <a:ext cx="10911535" cy="731520"/>
+          </a:xfrm>
+          <a:prstGeom prst="rect">
+            <a:avLst/>
+          </a:prstGeom>
+          <a:noFill/>
+        </p:spPr>
+        <p:txBody>
+          <a:bodyPr wrap="square">
+            <a:spAutoFit/>
+          </a:bodyPr>
+          <a:lstStyle/>
+          <a:p>
+            <a:pPr algn="ctr"/>
+            <a:r>
+              <a:rPr sz="4800" b="1" i="0">
+                <a:solidFill>
+                  <a:srgbClr val="FFFFFF"/>
+                </a:solidFill>
+                <a:latin typeface="Arial"/>
+              </a:rPr>
+              <a:t>ささげたい</a:t>
+            </a:r>
+          </a:p>
+        </p:txBody>
+      </p:sp>
+      <p:sp>
+        <p:nvSpPr>
+          <p:cNvPr id="5" name="TextBox 4"/>
+          <p:cNvSpPr txBox="1"/>
+          <p:nvPr/>
+        </p:nvSpPr>
+        <p:spPr>
+          <a:xfrm>
+            <a:off x="640080" y="3753612"/>
+            <a:ext cx="10911535" cy="365760"/>
+          </a:xfrm>
+          <a:prstGeom prst="rect">
+            <a:avLst/>
+          </a:prstGeom>
+          <a:noFill/>
+        </p:spPr>
+        <p:txBody>
+          <a:bodyPr wrap="square">
+            <a:spAutoFit/>
+          </a:bodyPr>
+          <a:lstStyle/>
+          <a:p>
+            <a:pPr algn="ctr"/>
+            <a:r>
+              <a:rPr sz="2400" b="0" i="1">
+                <a:solidFill>
+                  <a:srgbClr val="AAAAAA"/>
+                </a:solidFill>
+                <a:latin typeface="Arial"/>
+              </a:rPr>
+              <a:t>Sasagetai</a:t>
+            </a:r>
+          </a:p>
+        </p:txBody>
+      </p:sp>
+      <p:sp>
+        <p:nvSpPr>
+          <p:cNvPr id="6" name="TextBox 5"/>
+          <p:cNvSpPr txBox="1"/>
+          <p:nvPr/>
+        </p:nvSpPr>
+        <p:spPr>
+          <a:xfrm>
+            <a:off x="640080" y="4530852"/>
+            <a:ext cx="10911535" cy="310896"/>
           </a:xfrm>
           <a:prstGeom prst="rect">
             <a:avLst/>
@@ -4326,81 +4396,11 @@
             <a:r>
               <a:rPr sz="2000" b="0" i="1">
                 <a:solidFill>
-                  <a:srgbClr val="8C8C8C"/>
-                </a:solidFill>
-                <a:latin typeface="Arial"/>
-              </a:rPr>
-              <a:t/>
-            </a:r>
-          </a:p>
-        </p:txBody>
-      </p:sp>
-      <p:sp>
-        <p:nvSpPr>
-          <p:cNvPr id="5" name="TextBox 4"/>
-          <p:cNvSpPr txBox="1"/>
-          <p:nvPr/>
-        </p:nvSpPr>
-        <p:spPr>
-          <a:xfrm>
-            <a:off x="594360" y="3529584"/>
-            <a:ext cx="11002975" cy="685800"/>
-          </a:xfrm>
-          <a:prstGeom prst="rect">
-            <a:avLst/>
-          </a:prstGeom>
-          <a:noFill/>
-        </p:spPr>
-        <p:txBody>
-          <a:bodyPr wrap="square">
-            <a:spAutoFit/>
-          </a:bodyPr>
-          <a:lstStyle/>
-          <a:p>
-            <a:pPr algn="ctr"/>
-            <a:r>
-              <a:rPr sz="4400" b="1" i="0">
-                <a:solidFill>
-                  <a:srgbClr val="FFFFFF"/>
-                </a:solidFill>
-                <a:latin typeface="Arial"/>
-              </a:rPr>
-              <a:t>ささげたい</a:t>
-            </a:r>
-          </a:p>
-        </p:txBody>
-      </p:sp>
-      <p:sp>
-        <p:nvSpPr>
-          <p:cNvPr id="6" name="TextBox 5"/>
-          <p:cNvSpPr txBox="1"/>
-          <p:nvPr/>
-        </p:nvSpPr>
-        <p:spPr>
-          <a:xfrm>
-            <a:off x="594360" y="4251960"/>
-            <a:ext cx="11002975" cy="384048"/>
-          </a:xfrm>
-          <a:prstGeom prst="rect">
-            <a:avLst/>
-          </a:prstGeom>
-          <a:noFill/>
-        </p:spPr>
-        <p:txBody>
-          <a:bodyPr wrap="square">
-            <a:spAutoFit/>
-          </a:bodyPr>
-          <a:lstStyle/>
-          <a:p>
-            <a:pPr algn="ctr"/>
-            <a:r>
-              <a:rPr sz="2400" b="0" i="1">
-                <a:solidFill>
-                  <a:srgbClr val="B4B4B4"/>
-                </a:solidFill>
-                <a:latin typeface="Arial"/>
-              </a:rPr>
-              <a:t>Sasagetai</a:t>
+                  <a:srgbClr val="828282"/>
+                </a:solidFill>
+                <a:latin typeface="Arial"/>
+              </a:rPr>
+              <a:t>Embora eu seja fraco e pobre</a:t>
             </a:r>
           </a:p>
         </p:txBody>
@@ -4413,8 +4413,8 @@
         </p:nvSpPr>
         <p:spPr>
           <a:xfrm>
-            <a:off x="594360" y="4672584"/>
-            <a:ext cx="11002975" cy="347472"/>
+            <a:off x="640080" y="4896612"/>
+            <a:ext cx="10911535" cy="310896"/>
           </a:xfrm>
           <a:prstGeom prst="rect">
             <a:avLst/>
@@ -4431,11 +4431,11 @@
             <a:r>
               <a:rPr sz="2000" b="0" i="1">
                 <a:solidFill>
-                  <a:srgbClr val="8C8C8C"/>
-                </a:solidFill>
-                <a:latin typeface="Arial"/>
-              </a:rPr>
-              <a:t/>
+                  <a:srgbClr val="828282"/>
+                </a:solidFill>
+                <a:latin typeface="Arial"/>
+              </a:rPr>
+              <a:t>Tudo que tenho é Teu</a:t>
             </a:r>
           </a:p>
         </p:txBody>
@@ -4474,23 +4474,23 @@
         </p:nvSpPr>
         <p:spPr>
           <a:xfrm>
-            <a:off x="594360" y="1837944"/>
-            <a:ext cx="11002975" cy="685800"/>
-          </a:xfrm>
-          <a:prstGeom prst="rect">
-            <a:avLst/>
-          </a:prstGeom>
-          <a:noFill/>
-        </p:spPr>
-        <p:txBody>
-          <a:bodyPr wrap="square">
-            <a:spAutoFit/>
-          </a:bodyPr>
-          <a:lstStyle/>
-          <a:p>
-            <a:pPr algn="ctr"/>
-            <a:r>
-              <a:rPr sz="4400" b="1" i="0">
+            <a:off x="640080" y="1650492"/>
+            <a:ext cx="10911535" cy="731520"/>
+          </a:xfrm>
+          <a:prstGeom prst="rect">
+            <a:avLst/>
+          </a:prstGeom>
+          <a:noFill/>
+        </p:spPr>
+        <p:txBody>
+          <a:bodyPr wrap="square">
+            <a:spAutoFit/>
+          </a:bodyPr>
+          <a:lstStyle/>
+          <a:p>
+            <a:pPr algn="ctr"/>
+            <a:r>
+              <a:rPr sz="4800" b="1" i="0">
                 <a:solidFill>
                   <a:srgbClr val="FFFFFF"/>
                 </a:solidFill>
@@ -4509,8 +4509,8 @@
         </p:nvSpPr>
         <p:spPr>
           <a:xfrm>
-            <a:off x="594360" y="2560320"/>
-            <a:ext cx="11002975" cy="384048"/>
+            <a:off x="640080" y="2418588"/>
+            <a:ext cx="10911535" cy="365760"/>
           </a:xfrm>
           <a:prstGeom prst="rect">
             <a:avLst/>
@@ -4527,7 +4527,7 @@
             <a:r>
               <a:rPr sz="2400" b="0" i="1">
                 <a:solidFill>
-                  <a:srgbClr val="B4B4B4"/>
+                  <a:srgbClr val="AAAAAA"/>
                 </a:solidFill>
                 <a:latin typeface="Arial"/>
               </a:rPr>
@@ -4544,8 +4544,78 @@
         </p:nvSpPr>
         <p:spPr>
           <a:xfrm>
-            <a:off x="594360" y="2980944"/>
-            <a:ext cx="11002975" cy="347472"/>
+            <a:off x="640080" y="2985516"/>
+            <a:ext cx="10911535" cy="731520"/>
+          </a:xfrm>
+          <a:prstGeom prst="rect">
+            <a:avLst/>
+          </a:prstGeom>
+          <a:noFill/>
+        </p:spPr>
+        <p:txBody>
+          <a:bodyPr wrap="square">
+            <a:spAutoFit/>
+          </a:bodyPr>
+          <a:lstStyle/>
+          <a:p>
+            <a:pPr algn="ctr"/>
+            <a:r>
+              <a:rPr sz="4800" b="1" i="0">
+                <a:solidFill>
+                  <a:srgbClr val="FFFFFF"/>
+                </a:solidFill>
+                <a:latin typeface="Arial"/>
+              </a:rPr>
+              <a:t>この息さえも</a:t>
+            </a:r>
+          </a:p>
+        </p:txBody>
+      </p:sp>
+      <p:sp>
+        <p:nvSpPr>
+          <p:cNvPr id="5" name="TextBox 4"/>
+          <p:cNvSpPr txBox="1"/>
+          <p:nvPr/>
+        </p:nvSpPr>
+        <p:spPr>
+          <a:xfrm>
+            <a:off x="640080" y="3753612"/>
+            <a:ext cx="10911535" cy="365760"/>
+          </a:xfrm>
+          <a:prstGeom prst="rect">
+            <a:avLst/>
+          </a:prstGeom>
+          <a:noFill/>
+        </p:spPr>
+        <p:txBody>
+          <a:bodyPr wrap="square">
+            <a:spAutoFit/>
+          </a:bodyPr>
+          <a:lstStyle/>
+          <a:p>
+            <a:pPr algn="ctr"/>
+            <a:r>
+              <a:rPr sz="2400" b="0" i="1">
+                <a:solidFill>
+                  <a:srgbClr val="AAAAAA"/>
+                </a:solidFill>
+                <a:latin typeface="Arial"/>
+              </a:rPr>
+              <a:t>Kono iki sae mo</a:t>
+            </a:r>
+          </a:p>
+        </p:txBody>
+      </p:sp>
+      <p:sp>
+        <p:nvSpPr>
+          <p:cNvPr id="6" name="TextBox 5"/>
+          <p:cNvSpPr txBox="1"/>
+          <p:nvPr/>
+        </p:nvSpPr>
+        <p:spPr>
+          <a:xfrm>
+            <a:off x="640080" y="4530852"/>
+            <a:ext cx="10911535" cy="310896"/>
           </a:xfrm>
           <a:prstGeom prst="rect">
             <a:avLst/>
@@ -4562,81 +4632,11 @@
             <a:r>
               <a:rPr sz="2000" b="0" i="1">
                 <a:solidFill>
-                  <a:srgbClr val="8C8C8C"/>
-                </a:solidFill>
-                <a:latin typeface="Arial"/>
-              </a:rPr>
-              <a:t/>
-            </a:r>
-          </a:p>
-        </p:txBody>
-      </p:sp>
-      <p:sp>
-        <p:nvSpPr>
-          <p:cNvPr id="5" name="TextBox 4"/>
-          <p:cNvSpPr txBox="1"/>
-          <p:nvPr/>
-        </p:nvSpPr>
-        <p:spPr>
-          <a:xfrm>
-            <a:off x="594360" y="3529584"/>
-            <a:ext cx="11002975" cy="685800"/>
-          </a:xfrm>
-          <a:prstGeom prst="rect">
-            <a:avLst/>
-          </a:prstGeom>
-          <a:noFill/>
-        </p:spPr>
-        <p:txBody>
-          <a:bodyPr wrap="square">
-            <a:spAutoFit/>
-          </a:bodyPr>
-          <a:lstStyle/>
-          <a:p>
-            <a:pPr algn="ctr"/>
-            <a:r>
-              <a:rPr sz="4400" b="1" i="0">
-                <a:solidFill>
-                  <a:srgbClr val="FFFFFF"/>
-                </a:solidFill>
-                <a:latin typeface="Arial"/>
-              </a:rPr>
-              <a:t>この息さえも</a:t>
-            </a:r>
-          </a:p>
-        </p:txBody>
-      </p:sp>
-      <p:sp>
-        <p:nvSpPr>
-          <p:cNvPr id="6" name="TextBox 5"/>
-          <p:cNvSpPr txBox="1"/>
-          <p:nvPr/>
-        </p:nvSpPr>
-        <p:spPr>
-          <a:xfrm>
-            <a:off x="594360" y="4251960"/>
-            <a:ext cx="11002975" cy="384048"/>
-          </a:xfrm>
-          <a:prstGeom prst="rect">
-            <a:avLst/>
-          </a:prstGeom>
-          <a:noFill/>
-        </p:spPr>
-        <p:txBody>
-          <a:bodyPr wrap="square">
-            <a:spAutoFit/>
-          </a:bodyPr>
-          <a:lstStyle/>
-          <a:p>
-            <a:pPr algn="ctr"/>
-            <a:r>
-              <a:rPr sz="2400" b="0" i="1">
-                <a:solidFill>
-                  <a:srgbClr val="B4B4B4"/>
-                </a:solidFill>
-                <a:latin typeface="Arial"/>
-              </a:rPr>
-              <a:t>Kono iki sae mo</a:t>
+                  <a:srgbClr val="828282"/>
+                </a:solidFill>
+                <a:latin typeface="Arial"/>
+              </a:rPr>
+              <a:t>A cada fôlego que eu der</a:t>
             </a:r>
           </a:p>
         </p:txBody>
@@ -4649,8 +4649,8 @@
         </p:nvSpPr>
         <p:spPr>
           <a:xfrm>
-            <a:off x="594360" y="4672584"/>
-            <a:ext cx="11002975" cy="347472"/>
+            <a:off x="640080" y="4896612"/>
+            <a:ext cx="10911535" cy="310896"/>
           </a:xfrm>
           <a:prstGeom prst="rect">
             <a:avLst/>
@@ -4667,11 +4667,11 @@
             <a:r>
               <a:rPr sz="2000" b="0" i="1">
                 <a:solidFill>
-                  <a:srgbClr val="8C8C8C"/>
-                </a:solidFill>
-                <a:latin typeface="Arial"/>
-              </a:rPr>
-              <a:t/>
+                  <a:srgbClr val="828282"/>
+                </a:solidFill>
+                <a:latin typeface="Arial"/>
+              </a:rPr>
+              <a:t>Ninguém poderia expressar</a:t>
             </a:r>
           </a:p>
         </p:txBody>
@@ -4710,23 +4710,23 @@
         </p:nvSpPr>
         <p:spPr>
           <a:xfrm>
-            <a:off x="594360" y="2258568"/>
-            <a:ext cx="11002975" cy="685800"/>
-          </a:xfrm>
-          <a:prstGeom prst="rect">
-            <a:avLst/>
-          </a:prstGeom>
-          <a:noFill/>
-        </p:spPr>
-        <p:txBody>
-          <a:bodyPr wrap="square">
-            <a:spAutoFit/>
-          </a:bodyPr>
-          <a:lstStyle/>
-          <a:p>
-            <a:pPr algn="ctr"/>
-            <a:r>
-              <a:rPr sz="4400" b="1" i="0">
+            <a:off x="640080" y="2052828"/>
+            <a:ext cx="10911535" cy="731520"/>
+          </a:xfrm>
+          <a:prstGeom prst="rect">
+            <a:avLst/>
+          </a:prstGeom>
+          <a:noFill/>
+        </p:spPr>
+        <p:txBody>
+          <a:bodyPr wrap="square">
+            <a:spAutoFit/>
+          </a:bodyPr>
+          <a:lstStyle/>
+          <a:p>
+            <a:pPr algn="ctr"/>
+            <a:r>
+              <a:rPr sz="4800" b="1" i="0">
                 <a:solidFill>
                   <a:srgbClr val="FFFFFF"/>
                 </a:solidFill>
@@ -4745,29 +4745,29 @@
         </p:nvSpPr>
         <p:spPr>
           <a:xfrm>
-            <a:off x="594360" y="2980944"/>
-            <a:ext cx="11002975" cy="347472"/>
-          </a:xfrm>
-          <a:prstGeom prst="rect">
-            <a:avLst/>
-          </a:prstGeom>
-          <a:noFill/>
-        </p:spPr>
-        <p:txBody>
-          <a:bodyPr wrap="square">
-            <a:spAutoFit/>
-          </a:bodyPr>
-          <a:lstStyle/>
-          <a:p>
-            <a:pPr algn="ctr"/>
-            <a:r>
-              <a:rPr sz="2200" b="0" i="1">
-                <a:solidFill>
-                  <a:srgbClr val="8C8C8C"/>
-                </a:solidFill>
-                <a:latin typeface="Arial"/>
-              </a:rPr>
-              <a:t/>
+            <a:off x="640080" y="2985516"/>
+            <a:ext cx="10911535" cy="731520"/>
+          </a:xfrm>
+          <a:prstGeom prst="rect">
+            <a:avLst/>
+          </a:prstGeom>
+          <a:noFill/>
+        </p:spPr>
+        <p:txBody>
+          <a:bodyPr wrap="square">
+            <a:spAutoFit/>
+          </a:bodyPr>
+          <a:lstStyle/>
+          <a:p>
+            <a:pPr algn="ctr"/>
+            <a:r>
+              <a:rPr sz="4800" b="1" i="0">
+                <a:solidFill>
+                  <a:srgbClr val="FFFFFF"/>
+                </a:solidFill>
+                <a:latin typeface="Arial"/>
+              </a:rPr>
+              <a:t>Trarei mais do que uma canção</a:t>
             </a:r>
           </a:p>
         </p:txBody>
@@ -4780,29 +4780,29 @@
         </p:nvSpPr>
         <p:spPr>
           <a:xfrm>
-            <a:off x="594360" y="3529584"/>
-            <a:ext cx="11002975" cy="685800"/>
-          </a:xfrm>
-          <a:prstGeom prst="rect">
-            <a:avLst/>
-          </a:prstGeom>
-          <a:noFill/>
-        </p:spPr>
-        <p:txBody>
-          <a:bodyPr wrap="square">
-            <a:spAutoFit/>
-          </a:bodyPr>
-          <a:lstStyle/>
-          <a:p>
-            <a:pPr algn="ctr"/>
-            <a:r>
-              <a:rPr sz="4400" b="1" i="0">
-                <a:solidFill>
-                  <a:srgbClr val="FFFFFF"/>
-                </a:solidFill>
-                <a:latin typeface="Arial"/>
-              </a:rPr>
-              <a:t>Trarei mais do que uma canção</a:t>
+            <a:off x="640080" y="4128516"/>
+            <a:ext cx="10911535" cy="310896"/>
+          </a:xfrm>
+          <a:prstGeom prst="rect">
+            <a:avLst/>
+          </a:prstGeom>
+          <a:noFill/>
+        </p:spPr>
+        <p:txBody>
+          <a:bodyPr wrap="square">
+            <a:spAutoFit/>
+          </a:bodyPr>
+          <a:lstStyle/>
+          <a:p>
+            <a:pPr algn="ctr"/>
+            <a:r>
+              <a:rPr sz="2000" b="0" i="0">
+                <a:solidFill>
+                  <a:srgbClr val="828282"/>
+                </a:solidFill>
+                <a:latin typeface="Arial"/>
+              </a:rPr>
+              <a:t>あなた が 求 め て</a:t>
             </a:r>
           </a:p>
         </p:txBody>
@@ -4815,29 +4815,29 @@
         </p:nvSpPr>
         <p:spPr>
           <a:xfrm>
-            <a:off x="594360" y="4251960"/>
-            <a:ext cx="11002975" cy="347472"/>
-          </a:xfrm>
-          <a:prstGeom prst="rect">
-            <a:avLst/>
-          </a:prstGeom>
-          <a:noFill/>
-        </p:spPr>
-        <p:txBody>
-          <a:bodyPr wrap="square">
-            <a:spAutoFit/>
-          </a:bodyPr>
-          <a:lstStyle/>
-          <a:p>
-            <a:pPr algn="ctr"/>
-            <a:r>
-              <a:rPr sz="2200" b="0" i="1">
-                <a:solidFill>
-                  <a:srgbClr val="8C8C8C"/>
-                </a:solidFill>
-                <a:latin typeface="Arial"/>
-              </a:rPr>
-              <a:t/>
+            <a:off x="640080" y="4494276"/>
+            <a:ext cx="10911535" cy="310896"/>
+          </a:xfrm>
+          <a:prstGeom prst="rect">
+            <a:avLst/>
+          </a:prstGeom>
+          <a:noFill/>
+        </p:spPr>
+        <p:txBody>
+          <a:bodyPr wrap="square">
+            <a:spAutoFit/>
+          </a:bodyPr>
+          <a:lstStyle/>
+          <a:p>
+            <a:pPr algn="ctr"/>
+            <a:r>
+              <a:rPr sz="2000" b="0" i="0">
+                <a:solidFill>
+                  <a:srgbClr val="828282"/>
+                </a:solidFill>
+                <a:latin typeface="Arial"/>
+              </a:rPr>
+              <a:t>いるものは</a:t>
             </a:r>
           </a:p>
         </p:txBody>
@@ -4876,23 +4876,23 @@
         </p:nvSpPr>
         <p:spPr>
           <a:xfrm>
-            <a:off x="594360" y="2258568"/>
-            <a:ext cx="11002975" cy="685800"/>
-          </a:xfrm>
-          <a:prstGeom prst="rect">
-            <a:avLst/>
-          </a:prstGeom>
-          <a:noFill/>
-        </p:spPr>
-        <p:txBody>
-          <a:bodyPr wrap="square">
-            <a:spAutoFit/>
-          </a:bodyPr>
-          <a:lstStyle/>
-          <a:p>
-            <a:pPr algn="ctr"/>
-            <a:r>
-              <a:rPr sz="4400" b="1" i="0">
+            <a:off x="640080" y="2052828"/>
+            <a:ext cx="10911535" cy="731520"/>
+          </a:xfrm>
+          <a:prstGeom prst="rect">
+            <a:avLst/>
+          </a:prstGeom>
+          <a:noFill/>
+        </p:spPr>
+        <p:txBody>
+          <a:bodyPr wrap="square">
+            <a:spAutoFit/>
+          </a:bodyPr>
+          <a:lstStyle/>
+          <a:p>
+            <a:pPr algn="ctr"/>
+            <a:r>
+              <a:rPr sz="4800" b="1" i="0">
                 <a:solidFill>
                   <a:srgbClr val="FFFFFF"/>
                 </a:solidFill>
@@ -4911,29 +4911,29 @@
         </p:nvSpPr>
         <p:spPr>
           <a:xfrm>
-            <a:off x="594360" y="2980944"/>
-            <a:ext cx="11002975" cy="347472"/>
-          </a:xfrm>
-          <a:prstGeom prst="rect">
-            <a:avLst/>
-          </a:prstGeom>
-          <a:noFill/>
-        </p:spPr>
-        <p:txBody>
-          <a:bodyPr wrap="square">
-            <a:spAutoFit/>
-          </a:bodyPr>
-          <a:lstStyle/>
-          <a:p>
-            <a:pPr algn="ctr"/>
-            <a:r>
-              <a:rPr sz="2200" b="0" i="1">
-                <a:solidFill>
-                  <a:srgbClr val="8C8C8C"/>
-                </a:solidFill>
-                <a:latin typeface="Arial"/>
-              </a:rPr>
-              <a:t/>
+            <a:off x="640080" y="2985516"/>
+            <a:ext cx="10911535" cy="731520"/>
+          </a:xfrm>
+          <a:prstGeom prst="rect">
+            <a:avLst/>
+          </a:prstGeom>
+          <a:noFill/>
+        </p:spPr>
+        <p:txBody>
+          <a:bodyPr wrap="square">
+            <a:spAutoFit/>
+          </a:bodyPr>
+          <a:lstStyle/>
+          <a:p>
+            <a:pPr algn="ctr"/>
+            <a:r>
+              <a:rPr sz="4800" b="1" i="0">
+                <a:solidFill>
+                  <a:srgbClr val="FFFFFF"/>
+                </a:solidFill>
+                <a:latin typeface="Arial"/>
+              </a:rPr>
+              <a:t>Não é o que Tu necessitas</a:t>
             </a:r>
           </a:p>
         </p:txBody>
@@ -4946,29 +4946,29 @@
         </p:nvSpPr>
         <p:spPr>
           <a:xfrm>
-            <a:off x="594360" y="3529584"/>
-            <a:ext cx="11002975" cy="685800"/>
-          </a:xfrm>
-          <a:prstGeom prst="rect">
-            <a:avLst/>
-          </a:prstGeom>
-          <a:noFill/>
-        </p:spPr>
-        <p:txBody>
-          <a:bodyPr wrap="square">
-            <a:spAutoFit/>
-          </a:bodyPr>
-          <a:lstStyle/>
-          <a:p>
-            <a:pPr algn="ctr"/>
-            <a:r>
-              <a:rPr sz="4400" b="1" i="0">
-                <a:solidFill>
-                  <a:srgbClr val="FFFFFF"/>
-                </a:solidFill>
-                <a:latin typeface="Arial"/>
-              </a:rPr>
-              <a:t>Não é o que Tu necessitas</a:t>
+            <a:off x="640080" y="4128516"/>
+            <a:ext cx="10911535" cy="310896"/>
+          </a:xfrm>
+          <a:prstGeom prst="rect">
+            <a:avLst/>
+          </a:prstGeom>
+          <a:noFill/>
+        </p:spPr>
+        <p:txBody>
+          <a:bodyPr wrap="square">
+            <a:spAutoFit/>
+          </a:bodyPr>
+          <a:lstStyle/>
+          <a:p>
+            <a:pPr algn="ctr"/>
+            <a:r>
+              <a:rPr sz="2000" b="0" i="0">
+                <a:solidFill>
+                  <a:srgbClr val="828282"/>
+                </a:solidFill>
+                <a:latin typeface="Arial"/>
+              </a:rPr>
+              <a:t>歌 じゃないから</a:t>
             </a:r>
           </a:p>
         </p:txBody>
@@ -4981,29 +4981,29 @@
         </p:nvSpPr>
         <p:spPr>
           <a:xfrm>
-            <a:off x="594360" y="4251960"/>
-            <a:ext cx="11002975" cy="347472"/>
-          </a:xfrm>
-          <a:prstGeom prst="rect">
-            <a:avLst/>
-          </a:prstGeom>
-          <a:noFill/>
-        </p:spPr>
-        <p:txBody>
-          <a:bodyPr wrap="square">
-            <a:spAutoFit/>
-          </a:bodyPr>
-          <a:lstStyle/>
-          <a:p>
-            <a:pPr algn="ctr"/>
-            <a:r>
-              <a:rPr sz="2200" b="0" i="1">
-                <a:solidFill>
-                  <a:srgbClr val="8C8C8C"/>
-                </a:solidFill>
-                <a:latin typeface="Arial"/>
-              </a:rPr>
-              <a:t/>
+            <a:off x="640080" y="4494276"/>
+            <a:ext cx="10911535" cy="310896"/>
+          </a:xfrm>
+          <a:prstGeom prst="rect">
+            <a:avLst/>
+          </a:prstGeom>
+          <a:noFill/>
+        </p:spPr>
+        <p:txBody>
+          <a:bodyPr wrap="square">
+            <a:spAutoFit/>
+          </a:bodyPr>
+          <a:lstStyle/>
+          <a:p>
+            <a:pPr algn="ctr"/>
+            <a:r>
+              <a:rPr sz="2000" b="0" i="0">
+                <a:solidFill>
+                  <a:srgbClr val="828282"/>
+                </a:solidFill>
+                <a:latin typeface="Arial"/>
+              </a:rPr>
+              <a:t>わたし の こころ</a:t>
             </a:r>
           </a:p>
         </p:txBody>
@@ -5042,23 +5042,23 @@
         </p:nvSpPr>
         <p:spPr>
           <a:xfrm>
-            <a:off x="594360" y="2258568"/>
-            <a:ext cx="11002975" cy="685800"/>
-          </a:xfrm>
-          <a:prstGeom prst="rect">
-            <a:avLst/>
-          </a:prstGeom>
-          <a:noFill/>
-        </p:spPr>
-        <p:txBody>
-          <a:bodyPr wrap="square">
-            <a:spAutoFit/>
-          </a:bodyPr>
-          <a:lstStyle/>
-          <a:p>
-            <a:pPr algn="ctr"/>
-            <a:r>
-              <a:rPr sz="4400" b="1" i="0">
+            <a:off x="640080" y="2052828"/>
+            <a:ext cx="10911535" cy="731520"/>
+          </a:xfrm>
+          <a:prstGeom prst="rect">
+            <a:avLst/>
+          </a:prstGeom>
+          <a:noFill/>
+        </p:spPr>
+        <p:txBody>
+          <a:bodyPr wrap="square">
+            <a:spAutoFit/>
+          </a:bodyPr>
+          <a:lstStyle/>
+          <a:p>
+            <a:pPr algn="ctr"/>
+            <a:r>
+              <a:rPr sz="4800" b="1" i="0">
                 <a:solidFill>
                   <a:srgbClr val="FFFFFF"/>
                 </a:solidFill>
@@ -5077,29 +5077,29 @@
         </p:nvSpPr>
         <p:spPr>
           <a:xfrm>
-            <a:off x="594360" y="2980944"/>
-            <a:ext cx="11002975" cy="347472"/>
-          </a:xfrm>
-          <a:prstGeom prst="rect">
-            <a:avLst/>
-          </a:prstGeom>
-          <a:noFill/>
-        </p:spPr>
-        <p:txBody>
-          <a:bodyPr wrap="square">
-            <a:spAutoFit/>
-          </a:bodyPr>
-          <a:lstStyle/>
-          <a:p>
-            <a:pPr algn="ctr"/>
-            <a:r>
-              <a:rPr sz="2200" b="0" i="1">
-                <a:solidFill>
-                  <a:srgbClr val="8C8C8C"/>
-                </a:solidFill>
-                <a:latin typeface="Arial"/>
-              </a:rPr>
-              <a:t/>
+            <a:off x="640080" y="2985516"/>
+            <a:ext cx="10911535" cy="731520"/>
+          </a:xfrm>
+          <a:prstGeom prst="rect">
+            <a:avLst/>
+          </a:prstGeom>
+          <a:noFill/>
+        </p:spPr>
+        <p:txBody>
+          <a:bodyPr wrap="square">
+            <a:spAutoFit/>
+          </a:bodyPr>
+          <a:lstStyle/>
+          <a:p>
+            <a:pPr algn="ctr"/>
+            <a:r>
+              <a:rPr sz="4800" b="1" i="0">
+                <a:solidFill>
+                  <a:srgbClr val="FFFFFF"/>
+                </a:solidFill>
+                <a:latin typeface="Arial"/>
+              </a:rPr>
+              <a:t>Através da aparência das coisas</a:t>
             </a:r>
           </a:p>
         </p:txBody>
@@ -5112,29 +5112,29 @@
         </p:nvSpPr>
         <p:spPr>
           <a:xfrm>
-            <a:off x="594360" y="3529584"/>
-            <a:ext cx="11002975" cy="685800"/>
-          </a:xfrm>
-          <a:prstGeom prst="rect">
-            <a:avLst/>
-          </a:prstGeom>
-          <a:noFill/>
-        </p:spPr>
-        <p:txBody>
-          <a:bodyPr wrap="square">
-            <a:spAutoFit/>
-          </a:bodyPr>
-          <a:lstStyle/>
-          <a:p>
-            <a:pPr algn="ctr"/>
-            <a:r>
-              <a:rPr sz="4400" b="1" i="0">
-                <a:solidFill>
-                  <a:srgbClr val="FFFFFF"/>
-                </a:solidFill>
-                <a:latin typeface="Arial"/>
-              </a:rPr>
-              <a:t>Através da aparência das coisas</a:t>
+            <a:off x="640080" y="4128516"/>
+            <a:ext cx="10911535" cy="310896"/>
+          </a:xfrm>
+          <a:prstGeom prst="rect">
+            <a:avLst/>
+          </a:prstGeom>
+          <a:noFill/>
+        </p:spPr>
+        <p:txBody>
+          <a:bodyPr wrap="square">
+            <a:spAutoFit/>
+          </a:bodyPr>
+          <a:lstStyle/>
+          <a:p>
+            <a:pPr algn="ctr"/>
+            <a:r>
+              <a:rPr sz="2000" b="0" i="0">
+                <a:solidFill>
+                  <a:srgbClr val="828282"/>
+                </a:solidFill>
+                <a:latin typeface="Arial"/>
+              </a:rPr>
+              <a:t>深 く 探 り</a:t>
             </a:r>
           </a:p>
         </p:txBody>
@@ -5147,29 +5147,29 @@
         </p:nvSpPr>
         <p:spPr>
           <a:xfrm>
-            <a:off x="594360" y="4251960"/>
-            <a:ext cx="11002975" cy="347472"/>
-          </a:xfrm>
-          <a:prstGeom prst="rect">
-            <a:avLst/>
-          </a:prstGeom>
-          <a:noFill/>
-        </p:spPr>
-        <p:txBody>
-          <a:bodyPr wrap="square">
-            <a:spAutoFit/>
-          </a:bodyPr>
-          <a:lstStyle/>
-          <a:p>
-            <a:pPr algn="ctr"/>
-            <a:r>
-              <a:rPr sz="2200" b="0" i="1">
-                <a:solidFill>
-                  <a:srgbClr val="8C8C8C"/>
-                </a:solidFill>
-                <a:latin typeface="Arial"/>
-              </a:rPr>
-              <a:t/>
+            <a:off x="640080" y="4494276"/>
+            <a:ext cx="10911535" cy="310896"/>
+          </a:xfrm>
+          <a:prstGeom prst="rect">
+            <a:avLst/>
+          </a:prstGeom>
+          <a:noFill/>
+        </p:spPr>
+        <p:txBody>
+          <a:bodyPr wrap="square">
+            <a:spAutoFit/>
+          </a:bodyPr>
+          <a:lstStyle/>
+          <a:p>
+            <a:pPr algn="ctr"/>
+            <a:r>
+              <a:rPr sz="2000" b="0" i="0">
+                <a:solidFill>
+                  <a:srgbClr val="828282"/>
+                </a:solidFill>
+                <a:latin typeface="Arial"/>
+              </a:rPr>
+              <a:t>見 つ め て る か ら</a:t>
             </a:r>
           </a:p>
         </p:txBody>
@@ -5208,23 +5208,23 @@
         </p:nvSpPr>
         <p:spPr>
           <a:xfrm>
-            <a:off x="594360" y="2258568"/>
-            <a:ext cx="11002975" cy="685800"/>
-          </a:xfrm>
-          <a:prstGeom prst="rect">
-            <a:avLst/>
-          </a:prstGeom>
-          <a:noFill/>
-        </p:spPr>
-        <p:txBody>
-          <a:bodyPr wrap="square">
-            <a:spAutoFit/>
-          </a:bodyPr>
-          <a:lstStyle/>
-          <a:p>
-            <a:pPr algn="ctr"/>
-            <a:r>
-              <a:rPr sz="4400" b="1" i="0">
+            <a:off x="640080" y="2052828"/>
+            <a:ext cx="10911535" cy="731520"/>
+          </a:xfrm>
+          <a:prstGeom prst="rect">
+            <a:avLst/>
+          </a:prstGeom>
+          <a:noFill/>
+        </p:spPr>
+        <p:txBody>
+          <a:bodyPr wrap="square">
+            <a:spAutoFit/>
+          </a:bodyPr>
+          <a:lstStyle/>
+          <a:p>
+            <a:pPr algn="ctr"/>
+            <a:r>
+              <a:rPr sz="4800" b="1" i="0">
                 <a:solidFill>
                   <a:srgbClr val="FFFFFF"/>
                 </a:solidFill>
@@ -5243,29 +5243,29 @@
         </p:nvSpPr>
         <p:spPr>
           <a:xfrm>
-            <a:off x="594360" y="2980944"/>
-            <a:ext cx="11002975" cy="347472"/>
-          </a:xfrm>
-          <a:prstGeom prst="rect">
-            <a:avLst/>
-          </a:prstGeom>
-          <a:noFill/>
-        </p:spPr>
-        <p:txBody>
-          <a:bodyPr wrap="square">
-            <a:spAutoFit/>
-          </a:bodyPr>
-          <a:lstStyle/>
-          <a:p>
-            <a:pPr algn="ctr"/>
-            <a:r>
-              <a:rPr sz="2200" b="0" i="1">
-                <a:solidFill>
-                  <a:srgbClr val="8C8C8C"/>
-                </a:solidFill>
-                <a:latin typeface="Arial"/>
-              </a:rPr>
-              <a:t/>
+            <a:off x="640080" y="2985516"/>
+            <a:ext cx="10911535" cy="731520"/>
+          </a:xfrm>
+          <a:prstGeom prst="rect">
+            <a:avLst/>
+          </a:prstGeom>
+          <a:noFill/>
+        </p:spPr>
+        <p:txBody>
+          <a:bodyPr wrap="square">
+            <a:spAutoFit/>
+          </a:bodyPr>
+          <a:lstStyle/>
+          <a:p>
+            <a:pPr algn="ctr"/>
+            <a:r>
+              <a:rPr sz="4100" b="1" i="0">
+                <a:solidFill>
+                  <a:srgbClr val="FFFFFF"/>
+                </a:solidFill>
+                <a:latin typeface="Arial"/>
+              </a:rPr>
+              <a:t>Estou voltando ao coração da adoração</a:t>
             </a:r>
           </a:p>
         </p:txBody>
@@ -5278,29 +5278,29 @@
         </p:nvSpPr>
         <p:spPr>
           <a:xfrm>
-            <a:off x="594360" y="3529584"/>
-            <a:ext cx="11002975" cy="685800"/>
-          </a:xfrm>
-          <a:prstGeom prst="rect">
-            <a:avLst/>
-          </a:prstGeom>
-          <a:noFill/>
-        </p:spPr>
-        <p:txBody>
-          <a:bodyPr wrap="square">
-            <a:spAutoFit/>
-          </a:bodyPr>
-          <a:lstStyle/>
-          <a:p>
-            <a:pPr algn="ctr"/>
-            <a:r>
-              <a:rPr sz="3805" b="1" i="0">
-                <a:solidFill>
-                  <a:srgbClr val="FFFFFF"/>
-                </a:solidFill>
-                <a:latin typeface="Arial"/>
-              </a:rPr>
-              <a:t>Estou voltando ao coração da adoração</a:t>
+            <a:off x="640080" y="4128516"/>
+            <a:ext cx="10911535" cy="310896"/>
+          </a:xfrm>
+          <a:prstGeom prst="rect">
+            <a:avLst/>
+          </a:prstGeom>
+          <a:noFill/>
+        </p:spPr>
+        <p:txBody>
+          <a:bodyPr wrap="square">
+            <a:spAutoFit/>
+          </a:bodyPr>
+          <a:lstStyle/>
+          <a:p>
+            <a:pPr algn="ctr"/>
+            <a:r>
+              <a:rPr sz="2000" b="0" i="0">
+                <a:solidFill>
+                  <a:srgbClr val="828282"/>
+                </a:solidFill>
+                <a:latin typeface="Arial"/>
+              </a:rPr>
+              <a:t>心 か ら の 賛 美 へ</a:t>
             </a:r>
           </a:p>
         </p:txBody>
@@ -5313,29 +5313,29 @@
         </p:nvSpPr>
         <p:spPr>
           <a:xfrm>
-            <a:off x="594360" y="4251960"/>
-            <a:ext cx="11002975" cy="347472"/>
-          </a:xfrm>
-          <a:prstGeom prst="rect">
-            <a:avLst/>
-          </a:prstGeom>
-          <a:noFill/>
-        </p:spPr>
-        <p:txBody>
-          <a:bodyPr wrap="square">
-            <a:spAutoFit/>
-          </a:bodyPr>
-          <a:lstStyle/>
-          <a:p>
-            <a:pPr algn="ctr"/>
-            <a:r>
-              <a:rPr sz="2200" b="0" i="1">
-                <a:solidFill>
-                  <a:srgbClr val="8C8C8C"/>
-                </a:solidFill>
-                <a:latin typeface="Arial"/>
-              </a:rPr>
-              <a:t/>
+            <a:off x="640080" y="4494276"/>
+            <a:ext cx="10911535" cy="310896"/>
+          </a:xfrm>
+          <a:prstGeom prst="rect">
+            <a:avLst/>
+          </a:prstGeom>
+          <a:noFill/>
+        </p:spPr>
+        <p:txBody>
+          <a:bodyPr wrap="square">
+            <a:spAutoFit/>
+          </a:bodyPr>
+          <a:lstStyle/>
+          <a:p>
+            <a:pPr algn="ctr"/>
+            <a:r>
+              <a:rPr sz="2000" b="0" i="0">
+                <a:solidFill>
+                  <a:srgbClr val="828282"/>
+                </a:solidFill>
+                <a:latin typeface="Arial"/>
+              </a:rPr>
+              <a:t>帰ります</a:t>
             </a:r>
           </a:p>
         </p:txBody>
@@ -5374,23 +5374,23 @@
         </p:nvSpPr>
         <p:spPr>
           <a:xfrm>
-            <a:off x="594360" y="2258568"/>
-            <a:ext cx="11002975" cy="685800"/>
-          </a:xfrm>
-          <a:prstGeom prst="rect">
-            <a:avLst/>
-          </a:prstGeom>
-          <a:noFill/>
-        </p:spPr>
-        <p:txBody>
-          <a:bodyPr wrap="square">
-            <a:spAutoFit/>
-          </a:bodyPr>
-          <a:lstStyle/>
-          <a:p>
-            <a:pPr algn="ctr"/>
-            <a:r>
-              <a:rPr sz="4400" b="1" i="0">
+            <a:off x="640080" y="2052828"/>
+            <a:ext cx="10911535" cy="731520"/>
+          </a:xfrm>
+          <a:prstGeom prst="rect">
+            <a:avLst/>
+          </a:prstGeom>
+          <a:noFill/>
+        </p:spPr>
+        <p:txBody>
+          <a:bodyPr wrap="square">
+            <a:spAutoFit/>
+          </a:bodyPr>
+          <a:lstStyle/>
+          <a:p>
+            <a:pPr algn="ctr"/>
+            <a:r>
+              <a:rPr sz="4800" b="1" i="0">
                 <a:solidFill>
                   <a:srgbClr val="FFFFFF"/>
                 </a:solidFill>
@@ -5409,29 +5409,29 @@
         </p:nvSpPr>
         <p:spPr>
           <a:xfrm>
-            <a:off x="594360" y="2980944"/>
-            <a:ext cx="11002975" cy="347472"/>
-          </a:xfrm>
-          <a:prstGeom prst="rect">
-            <a:avLst/>
-          </a:prstGeom>
-          <a:noFill/>
-        </p:spPr>
-        <p:txBody>
-          <a:bodyPr wrap="square">
-            <a:spAutoFit/>
-          </a:bodyPr>
-          <a:lstStyle/>
-          <a:p>
-            <a:pPr algn="ctr"/>
-            <a:r>
-              <a:rPr sz="2200" b="0" i="1">
-                <a:solidFill>
-                  <a:srgbClr val="8C8C8C"/>
-                </a:solidFill>
-                <a:latin typeface="Arial"/>
-              </a:rPr>
-              <a:t/>
+            <a:off x="640080" y="2985516"/>
+            <a:ext cx="10911535" cy="731520"/>
+          </a:xfrm>
+          <a:prstGeom prst="rect">
+            <a:avLst/>
+          </a:prstGeom>
+          <a:noFill/>
+        </p:spPr>
+        <p:txBody>
+          <a:bodyPr wrap="square">
+            <a:spAutoFit/>
+          </a:bodyPr>
+          <a:lstStyle/>
+          <a:p>
+            <a:pPr algn="ctr"/>
+            <a:r>
+              <a:rPr sz="4800" b="1" i="0">
+                <a:solidFill>
+                  <a:srgbClr val="FFFFFF"/>
+                </a:solidFill>
+                <a:latin typeface="Arial"/>
+              </a:rPr>
+              <a:t>E eu simplesmente venho</a:t>
             </a:r>
           </a:p>
         </p:txBody>
@@ -5444,29 +5444,29 @@
         </p:nvSpPr>
         <p:spPr>
           <a:xfrm>
-            <a:off x="594360" y="3529584"/>
-            <a:ext cx="11002975" cy="685800"/>
-          </a:xfrm>
-          <a:prstGeom prst="rect">
-            <a:avLst/>
-          </a:prstGeom>
-          <a:noFill/>
-        </p:spPr>
-        <p:txBody>
-          <a:bodyPr wrap="square">
-            <a:spAutoFit/>
-          </a:bodyPr>
-          <a:lstStyle/>
-          <a:p>
-            <a:pPr algn="ctr"/>
-            <a:r>
-              <a:rPr sz="4400" b="1" i="0">
-                <a:solidFill>
-                  <a:srgbClr val="FFFFFF"/>
-                </a:solidFill>
-                <a:latin typeface="Arial"/>
-              </a:rPr>
-              <a:t>E eu simplesmente venho</a:t>
+            <a:off x="640080" y="4128516"/>
+            <a:ext cx="10911535" cy="310896"/>
+          </a:xfrm>
+          <a:prstGeom prst="rect">
+            <a:avLst/>
+          </a:prstGeom>
+          <a:noFill/>
+        </p:spPr>
+        <p:txBody>
+          <a:bodyPr wrap="square">
+            <a:spAutoFit/>
+          </a:bodyPr>
+          <a:lstStyle/>
+          <a:p>
+            <a:pPr algn="ctr"/>
+            <a:r>
+              <a:rPr sz="2000" b="0" i="0">
+                <a:solidFill>
+                  <a:srgbClr val="828282"/>
+                </a:solidFill>
+                <a:latin typeface="Arial"/>
+              </a:rPr>
+              <a:t>その先へ</a:t>
             </a:r>
           </a:p>
         </p:txBody>
@@ -5479,29 +5479,29 @@
         </p:nvSpPr>
         <p:spPr>
           <a:xfrm>
-            <a:off x="594360" y="4251960"/>
-            <a:ext cx="11002975" cy="347472"/>
-          </a:xfrm>
-          <a:prstGeom prst="rect">
-            <a:avLst/>
-          </a:prstGeom>
-          <a:noFill/>
-        </p:spPr>
-        <p:txBody>
-          <a:bodyPr wrap="square">
-            <a:spAutoFit/>
-          </a:bodyPr>
-          <a:lstStyle/>
-          <a:p>
-            <a:pPr algn="ctr"/>
-            <a:r>
-              <a:rPr sz="2200" b="0" i="1">
-                <a:solidFill>
-                  <a:srgbClr val="8C8C8C"/>
-                </a:solidFill>
-                <a:latin typeface="Arial"/>
-              </a:rPr>
-              <a:t/>
+            <a:off x="640080" y="4494276"/>
+            <a:ext cx="10911535" cy="310896"/>
+          </a:xfrm>
+          <a:prstGeom prst="rect">
+            <a:avLst/>
+          </a:prstGeom>
+          <a:noFill/>
+        </p:spPr>
+        <p:txBody>
+          <a:bodyPr wrap="square">
+            <a:spAutoFit/>
+          </a:bodyPr>
+          <a:lstStyle/>
+          <a:p>
+            <a:pPr algn="ctr"/>
+            <a:r>
+              <a:rPr sz="2000" b="0" i="0">
+                <a:solidFill>
+                  <a:srgbClr val="828282"/>
+                </a:solidFill>
+                <a:latin typeface="Arial"/>
+              </a:rPr>
+              <a:t>よろこびを</a:t>
             </a:r>
           </a:p>
         </p:txBody>
@@ -5540,23 +5540,23 @@
         </p:nvSpPr>
         <p:spPr>
           <a:xfrm>
-            <a:off x="594360" y="2258568"/>
-            <a:ext cx="11002975" cy="685800"/>
-          </a:xfrm>
-          <a:prstGeom prst="rect">
-            <a:avLst/>
-          </a:prstGeom>
-          <a:noFill/>
-        </p:spPr>
-        <p:txBody>
-          <a:bodyPr wrap="square">
-            <a:spAutoFit/>
-          </a:bodyPr>
-          <a:lstStyle/>
-          <a:p>
-            <a:pPr algn="ctr"/>
-            <a:r>
-              <a:rPr sz="4400" b="1" i="0">
+            <a:off x="640080" y="2052828"/>
+            <a:ext cx="10911535" cy="731520"/>
+          </a:xfrm>
+          <a:prstGeom prst="rect">
+            <a:avLst/>
+          </a:prstGeom>
+          <a:noFill/>
+        </p:spPr>
+        <p:txBody>
+          <a:bodyPr wrap="square">
+            <a:spAutoFit/>
+          </a:bodyPr>
+          <a:lstStyle/>
+          <a:p>
+            <a:pPr algn="ctr"/>
+            <a:r>
+              <a:rPr sz="4800" b="1" i="0">
                 <a:solidFill>
                   <a:srgbClr val="FFFFFF"/>
                 </a:solidFill>
@@ -5575,29 +5575,29 @@
         </p:nvSpPr>
         <p:spPr>
           <a:xfrm>
-            <a:off x="594360" y="2980944"/>
-            <a:ext cx="11002975" cy="347472"/>
-          </a:xfrm>
-          <a:prstGeom prst="rect">
-            <a:avLst/>
-          </a:prstGeom>
-          <a:noFill/>
-        </p:spPr>
-        <p:txBody>
-          <a:bodyPr wrap="square">
-            <a:spAutoFit/>
-          </a:bodyPr>
-          <a:lstStyle/>
-          <a:p>
-            <a:pPr algn="ctr"/>
-            <a:r>
-              <a:rPr sz="2200" b="0" i="1">
-                <a:solidFill>
-                  <a:srgbClr val="8C8C8C"/>
-                </a:solidFill>
-                <a:latin typeface="Arial"/>
-              </a:rPr>
-              <a:t/>
+            <a:off x="640080" y="2985516"/>
+            <a:ext cx="10911535" cy="731520"/>
+          </a:xfrm>
+          <a:prstGeom prst="rect">
+            <a:avLst/>
+          </a:prstGeom>
+          <a:noFill/>
+        </p:spPr>
+        <p:txBody>
+          <a:bodyPr wrap="square">
+            <a:spAutoFit/>
+          </a:bodyPr>
+          <a:lstStyle/>
+          <a:p>
+            <a:pPr algn="ctr"/>
+            <a:r>
+              <a:rPr sz="4800" b="1" i="0">
+                <a:solidFill>
+                  <a:srgbClr val="FFFFFF"/>
+                </a:solidFill>
+                <a:latin typeface="Arial"/>
+              </a:rPr>
+              <a:t>Tudo sobre Ti, Jesus</a:t>
             </a:r>
           </a:p>
         </p:txBody>
@@ -5610,29 +5610,29 @@
         </p:nvSpPr>
         <p:spPr>
           <a:xfrm>
-            <a:off x="594360" y="3529584"/>
-            <a:ext cx="11002975" cy="685800"/>
-          </a:xfrm>
-          <a:prstGeom prst="rect">
-            <a:avLst/>
-          </a:prstGeom>
-          <a:noFill/>
-        </p:spPr>
-        <p:txBody>
-          <a:bodyPr wrap="square">
-            <a:spAutoFit/>
-          </a:bodyPr>
-          <a:lstStyle/>
-          <a:p>
-            <a:pPr algn="ctr"/>
-            <a:r>
-              <a:rPr sz="4400" b="1" i="0">
-                <a:solidFill>
-                  <a:srgbClr val="FFFFFF"/>
-                </a:solidFill>
-                <a:latin typeface="Arial"/>
-              </a:rPr>
-              <a:t>Tudo sobre Ti, Jesus</a:t>
+            <a:off x="640080" y="4128516"/>
+            <a:ext cx="10911535" cy="310896"/>
+          </a:xfrm>
+          <a:prstGeom prst="rect">
+            <a:avLst/>
+          </a:prstGeom>
+          <a:noFill/>
+        </p:spPr>
+        <p:txBody>
+          <a:bodyPr wrap="square">
+            <a:spAutoFit/>
+          </a:bodyPr>
+          <a:lstStyle/>
+          <a:p>
+            <a:pPr algn="ctr"/>
+            <a:r>
+              <a:rPr sz="2000" b="0" i="0">
+                <a:solidFill>
+                  <a:srgbClr val="828282"/>
+                </a:solidFill>
+                <a:latin typeface="Arial"/>
+              </a:rPr>
+              <a:t>主イエス あ な た へ</a:t>
             </a:r>
           </a:p>
         </p:txBody>
@@ -5645,29 +5645,29 @@
         </p:nvSpPr>
         <p:spPr>
           <a:xfrm>
-            <a:off x="594360" y="4251960"/>
-            <a:ext cx="11002975" cy="347472"/>
-          </a:xfrm>
-          <a:prstGeom prst="rect">
-            <a:avLst/>
-          </a:prstGeom>
-          <a:noFill/>
-        </p:spPr>
-        <p:txBody>
-          <a:bodyPr wrap="square">
-            <a:spAutoFit/>
-          </a:bodyPr>
-          <a:lstStyle/>
-          <a:p>
-            <a:pPr algn="ctr"/>
-            <a:r>
-              <a:rPr sz="2200" b="0" i="1">
-                <a:solidFill>
-                  <a:srgbClr val="8C8C8C"/>
-                </a:solidFill>
-                <a:latin typeface="Arial"/>
-              </a:rPr>
-              <a:t/>
+            <a:off x="640080" y="4494276"/>
+            <a:ext cx="10911535" cy="310896"/>
+          </a:xfrm>
+          <a:prstGeom prst="rect">
+            <a:avLst/>
+          </a:prstGeom>
+          <a:noFill/>
+        </p:spPr>
+        <p:txBody>
+          <a:bodyPr wrap="square">
+            <a:spAutoFit/>
+          </a:bodyPr>
+          <a:lstStyle/>
+          <a:p>
+            <a:pPr algn="ctr"/>
+            <a:r>
+              <a:rPr sz="2000" b="0" i="0">
+                <a:solidFill>
+                  <a:srgbClr val="828282"/>
+                </a:solidFill>
+                <a:latin typeface="Arial"/>
+              </a:rPr>
+              <a:t>勝手な 自分 捨てて</a:t>
             </a:r>
           </a:p>
         </p:txBody>
@@ -5706,23 +5706,23 @@
         </p:nvSpPr>
         <p:spPr>
           <a:xfrm>
-            <a:off x="594360" y="2258568"/>
-            <a:ext cx="11002975" cy="685800"/>
-          </a:xfrm>
-          <a:prstGeom prst="rect">
-            <a:avLst/>
-          </a:prstGeom>
-          <a:noFill/>
-        </p:spPr>
-        <p:txBody>
-          <a:bodyPr wrap="square">
-            <a:spAutoFit/>
-          </a:bodyPr>
-          <a:lstStyle/>
-          <a:p>
-            <a:pPr algn="ctr"/>
-            <a:r>
-              <a:rPr sz="4400" b="1" i="0">
+            <a:off x="640080" y="2052828"/>
+            <a:ext cx="10911535" cy="731520"/>
+          </a:xfrm>
+          <a:prstGeom prst="rect">
+            <a:avLst/>
+          </a:prstGeom>
+          <a:noFill/>
+        </p:spPr>
+        <p:txBody>
+          <a:bodyPr wrap="square">
+            <a:spAutoFit/>
+          </a:bodyPr>
+          <a:lstStyle/>
+          <a:p>
+            <a:pPr algn="ctr"/>
+            <a:r>
+              <a:rPr sz="4800" b="1" i="0">
                 <a:solidFill>
                   <a:srgbClr val="FFFFFF"/>
                 </a:solidFill>
@@ -5741,29 +5741,29 @@
         </p:nvSpPr>
         <p:spPr>
           <a:xfrm>
-            <a:off x="594360" y="2980944"/>
-            <a:ext cx="11002975" cy="347472"/>
-          </a:xfrm>
-          <a:prstGeom prst="rect">
-            <a:avLst/>
-          </a:prstGeom>
-          <a:noFill/>
-        </p:spPr>
-        <p:txBody>
-          <a:bodyPr wrap="square">
-            <a:spAutoFit/>
-          </a:bodyPr>
-          <a:lstStyle/>
-          <a:p>
-            <a:pPr algn="ctr"/>
-            <a:r>
-              <a:rPr sz="2200" b="0" i="1">
-                <a:solidFill>
-                  <a:srgbClr val="8C8C8C"/>
-                </a:solidFill>
-                <a:latin typeface="Arial"/>
-              </a:rPr>
-              <a:t/>
+            <a:off x="640080" y="2985516"/>
+            <a:ext cx="10911535" cy="731520"/>
+          </a:xfrm>
+          <a:prstGeom prst="rect">
+            <a:avLst/>
+          </a:prstGeom>
+          <a:noFill/>
+        </p:spPr>
+        <p:txBody>
+          <a:bodyPr wrap="square">
+            <a:spAutoFit/>
+          </a:bodyPr>
+          <a:lstStyle/>
+          <a:p>
+            <a:pPr algn="ctr"/>
+            <a:r>
+              <a:rPr sz="4800" b="1" i="0">
+                <a:solidFill>
+                  <a:srgbClr val="FFFFFF"/>
+                </a:solidFill>
+                <a:latin typeface="Arial"/>
+              </a:rPr>
+              <a:t>Quando não era tudo sobre Ti</a:t>
             </a:r>
           </a:p>
         </p:txBody>
@@ -5776,29 +5776,29 @@
         </p:nvSpPr>
         <p:spPr>
           <a:xfrm>
-            <a:off x="594360" y="3529584"/>
-            <a:ext cx="11002975" cy="685800"/>
-          </a:xfrm>
-          <a:prstGeom prst="rect">
-            <a:avLst/>
-          </a:prstGeom>
-          <a:noFill/>
-        </p:spPr>
-        <p:txBody>
-          <a:bodyPr wrap="square">
-            <a:spAutoFit/>
-          </a:bodyPr>
-          <a:lstStyle/>
-          <a:p>
-            <a:pPr algn="ctr"/>
-            <a:r>
-              <a:rPr sz="4400" b="1" i="0">
-                <a:solidFill>
-                  <a:srgbClr val="FFFFFF"/>
-                </a:solidFill>
-                <a:latin typeface="Arial"/>
-              </a:rPr>
-              <a:t>Quando não era tudo sobre Ti</a:t>
+            <a:off x="640080" y="4128516"/>
+            <a:ext cx="10911535" cy="310896"/>
+          </a:xfrm>
+          <a:prstGeom prst="rect">
+            <a:avLst/>
+          </a:prstGeom>
+          <a:noFill/>
+        </p:spPr>
+        <p:txBody>
+          <a:bodyPr wrap="square">
+            <a:spAutoFit/>
+          </a:bodyPr>
+          <a:lstStyle/>
+          <a:p>
+            <a:pPr algn="ctr"/>
+            <a:r>
+              <a:rPr sz="2000" b="0" i="0">
+                <a:solidFill>
+                  <a:srgbClr val="828282"/>
+                </a:solidFill>
+                <a:latin typeface="Arial"/>
+              </a:rPr>
+              <a:t>帰ります</a:t>
             </a:r>
           </a:p>
         </p:txBody>
@@ -5811,29 +5811,29 @@
         </p:nvSpPr>
         <p:spPr>
           <a:xfrm>
-            <a:off x="594360" y="4251960"/>
-            <a:ext cx="11002975" cy="347472"/>
-          </a:xfrm>
-          <a:prstGeom prst="rect">
-            <a:avLst/>
-          </a:prstGeom>
-          <a:noFill/>
-        </p:spPr>
-        <p:txBody>
-          <a:bodyPr wrap="square">
-            <a:spAutoFit/>
-          </a:bodyPr>
-          <a:lstStyle/>
-          <a:p>
-            <a:pPr algn="ctr"/>
-            <a:r>
-              <a:rPr sz="2200" b="0" i="1">
-                <a:solidFill>
-                  <a:srgbClr val="8C8C8C"/>
-                </a:solidFill>
-                <a:latin typeface="Arial"/>
-              </a:rPr>
-              <a:t/>
+            <a:off x="640080" y="4494276"/>
+            <a:ext cx="10911535" cy="310896"/>
+          </a:xfrm>
+          <a:prstGeom prst="rect">
+            <a:avLst/>
+          </a:prstGeom>
+          <a:noFill/>
+        </p:spPr>
+        <p:txBody>
+          <a:bodyPr wrap="square">
+            <a:spAutoFit/>
+          </a:bodyPr>
+          <a:lstStyle/>
+          <a:p>
+            <a:pPr algn="ctr"/>
+            <a:r>
+              <a:rPr sz="2000" b="0" i="0">
+                <a:solidFill>
+                  <a:srgbClr val="828282"/>
+                </a:solidFill>
+                <a:latin typeface="Arial"/>
+              </a:rPr>
+              <a:t>主イエス あ な た へ</a:t>
             </a:r>
           </a:p>
         </p:txBody>
@@ -5872,23 +5872,23 @@
         </p:nvSpPr>
         <p:spPr>
           <a:xfrm>
-            <a:off x="594360" y="2258568"/>
-            <a:ext cx="11002975" cy="685800"/>
-          </a:xfrm>
-          <a:prstGeom prst="rect">
-            <a:avLst/>
-          </a:prstGeom>
-          <a:noFill/>
-        </p:spPr>
-        <p:txBody>
-          <a:bodyPr wrap="square">
-            <a:spAutoFit/>
-          </a:bodyPr>
-          <a:lstStyle/>
-          <a:p>
-            <a:pPr algn="ctr"/>
-            <a:r>
-              <a:rPr sz="4400" b="1" i="0">
+            <a:off x="640080" y="2052828"/>
+            <a:ext cx="10911535" cy="731520"/>
+          </a:xfrm>
+          <a:prstGeom prst="rect">
+            <a:avLst/>
+          </a:prstGeom>
+          <a:noFill/>
+        </p:spPr>
+        <p:txBody>
+          <a:bodyPr wrap="square">
+            <a:spAutoFit/>
+          </a:bodyPr>
+          <a:lstStyle/>
+          <a:p>
+            <a:pPr algn="ctr"/>
+            <a:r>
+              <a:rPr sz="4800" b="1" i="0">
                 <a:solidFill>
                   <a:srgbClr val="FFFFFF"/>
                 </a:solidFill>
@@ -5907,99 +5907,29 @@
         </p:nvSpPr>
         <p:spPr>
           <a:xfrm>
-            <a:off x="594360" y="2980944"/>
-            <a:ext cx="11002975" cy="347472"/>
-          </a:xfrm>
-          <a:prstGeom prst="rect">
-            <a:avLst/>
-          </a:prstGeom>
-          <a:noFill/>
-        </p:spPr>
-        <p:txBody>
-          <a:bodyPr wrap="square">
-            <a:spAutoFit/>
-          </a:bodyPr>
-          <a:lstStyle/>
-          <a:p>
-            <a:pPr algn="ctr"/>
-            <a:r>
-              <a:rPr sz="2200" b="0" i="1">
-                <a:solidFill>
-                  <a:srgbClr val="8C8C8C"/>
-                </a:solidFill>
-                <a:latin typeface="Arial"/>
-              </a:rPr>
-              <a:t/>
-            </a:r>
-          </a:p>
-        </p:txBody>
-      </p:sp>
-      <p:sp>
-        <p:nvSpPr>
-          <p:cNvPr id="4" name="TextBox 3"/>
-          <p:cNvSpPr txBox="1"/>
-          <p:nvPr/>
-        </p:nvSpPr>
-        <p:spPr>
-          <a:xfrm>
-            <a:off x="594360" y="3529584"/>
-            <a:ext cx="11002975" cy="685800"/>
-          </a:xfrm>
-          <a:prstGeom prst="rect">
-            <a:avLst/>
-          </a:prstGeom>
-          <a:noFill/>
-        </p:spPr>
-        <p:txBody>
-          <a:bodyPr wrap="square">
-            <a:spAutoFit/>
-          </a:bodyPr>
-          <a:lstStyle/>
-          <a:p>
-            <a:pPr algn="ctr"/>
-            <a:r>
-              <a:rPr sz="4400" b="1" i="0">
+            <a:off x="640080" y="2985516"/>
+            <a:ext cx="10911535" cy="731520"/>
+          </a:xfrm>
+          <a:prstGeom prst="rect">
+            <a:avLst/>
+          </a:prstGeom>
+          <a:noFill/>
+        </p:spPr>
+        <p:txBody>
+          <a:bodyPr wrap="square">
+            <a:spAutoFit/>
+          </a:bodyPr>
+          <a:lstStyle/>
+          <a:p>
+            <a:pPr algn="ctr"/>
+            <a:r>
+              <a:rPr sz="4800" b="1" i="0">
                 <a:solidFill>
                   <a:srgbClr val="FFFFFF"/>
                 </a:solidFill>
                 <a:latin typeface="Arial"/>
               </a:rPr>
               <a:t>Rei de infinito valor</a:t>
-            </a:r>
-          </a:p>
-        </p:txBody>
-      </p:sp>
-      <p:sp>
-        <p:nvSpPr>
-          <p:cNvPr id="5" name="TextBox 4"/>
-          <p:cNvSpPr txBox="1"/>
-          <p:nvPr/>
-        </p:nvSpPr>
-        <p:spPr>
-          <a:xfrm>
-            <a:off x="594360" y="4251960"/>
-            <a:ext cx="11002975" cy="347472"/>
-          </a:xfrm>
-          <a:prstGeom prst="rect">
-            <a:avLst/>
-          </a:prstGeom>
-          <a:noFill/>
-        </p:spPr>
-        <p:txBody>
-          <a:bodyPr wrap="square">
-            <a:spAutoFit/>
-          </a:bodyPr>
-          <a:lstStyle/>
-          <a:p>
-            <a:pPr algn="ctr"/>
-            <a:r>
-              <a:rPr sz="2200" b="0" i="1">
-                <a:solidFill>
-                  <a:srgbClr val="8C8C8C"/>
-                </a:solidFill>
-                <a:latin typeface="Arial"/>
-              </a:rPr>
-              <a:t/>
             </a:r>
           </a:p>
         </p:txBody>
@@ -6038,23 +5968,23 @@
         </p:nvSpPr>
         <p:spPr>
           <a:xfrm>
-            <a:off x="594360" y="2258568"/>
-            <a:ext cx="11002975" cy="685800"/>
-          </a:xfrm>
-          <a:prstGeom prst="rect">
-            <a:avLst/>
-          </a:prstGeom>
-          <a:noFill/>
-        </p:spPr>
-        <p:txBody>
-          <a:bodyPr wrap="square">
-            <a:spAutoFit/>
-          </a:bodyPr>
-          <a:lstStyle/>
-          <a:p>
-            <a:pPr algn="ctr"/>
-            <a:r>
-              <a:rPr sz="4400" b="1" i="0">
+            <a:off x="640080" y="2052828"/>
+            <a:ext cx="10911535" cy="731520"/>
+          </a:xfrm>
+          <a:prstGeom prst="rect">
+            <a:avLst/>
+          </a:prstGeom>
+          <a:noFill/>
+        </p:spPr>
+        <p:txBody>
+          <a:bodyPr wrap="square">
+            <a:spAutoFit/>
+          </a:bodyPr>
+          <a:lstStyle/>
+          <a:p>
+            <a:pPr algn="ctr"/>
+            <a:r>
+              <a:rPr sz="4800" b="1" i="0">
                 <a:solidFill>
                   <a:srgbClr val="FFFFFF"/>
                 </a:solidFill>
@@ -6073,29 +6003,29 @@
         </p:nvSpPr>
         <p:spPr>
           <a:xfrm>
-            <a:off x="594360" y="2980944"/>
-            <a:ext cx="11002975" cy="347472"/>
-          </a:xfrm>
-          <a:prstGeom prst="rect">
-            <a:avLst/>
-          </a:prstGeom>
-          <a:noFill/>
-        </p:spPr>
-        <p:txBody>
-          <a:bodyPr wrap="square">
-            <a:spAutoFit/>
-          </a:bodyPr>
-          <a:lstStyle/>
-          <a:p>
-            <a:pPr algn="ctr"/>
-            <a:r>
-              <a:rPr sz="2200" b="0" i="1">
-                <a:solidFill>
-                  <a:srgbClr val="8C8C8C"/>
-                </a:solidFill>
-                <a:latin typeface="Arial"/>
-              </a:rPr>
-              <a:t/>
+            <a:off x="640080" y="2985516"/>
+            <a:ext cx="10911535" cy="731520"/>
+          </a:xfrm>
+          <a:prstGeom prst="rect">
+            <a:avLst/>
+          </a:prstGeom>
+          <a:noFill/>
+        </p:spPr>
+        <p:txBody>
+          <a:bodyPr wrap="square">
+            <a:spAutoFit/>
+          </a:bodyPr>
+          <a:lstStyle/>
+          <a:p>
+            <a:pPr algn="ctr"/>
+            <a:r>
+              <a:rPr sz="4800" b="1" i="0">
+                <a:solidFill>
+                  <a:srgbClr val="FFFFFF"/>
+                </a:solidFill>
+                <a:latin typeface="Arial"/>
+              </a:rPr>
+              <a:t>Quanto Tu mereces</a:t>
             </a:r>
           </a:p>
         </p:txBody>
@@ -6108,29 +6038,29 @@
         </p:nvSpPr>
         <p:spPr>
           <a:xfrm>
-            <a:off x="594360" y="3529584"/>
-            <a:ext cx="11002975" cy="685800"/>
-          </a:xfrm>
-          <a:prstGeom prst="rect">
-            <a:avLst/>
-          </a:prstGeom>
-          <a:noFill/>
-        </p:spPr>
-        <p:txBody>
-          <a:bodyPr wrap="square">
-            <a:spAutoFit/>
-          </a:bodyPr>
-          <a:lstStyle/>
-          <a:p>
-            <a:pPr algn="ctr"/>
-            <a:r>
-              <a:rPr sz="4400" b="1" i="0">
-                <a:solidFill>
-                  <a:srgbClr val="FFFFFF"/>
-                </a:solidFill>
-                <a:latin typeface="Arial"/>
-              </a:rPr>
-              <a:t>Quanto Tu mereces</a:t>
+            <a:off x="640080" y="4128516"/>
+            <a:ext cx="10911535" cy="310896"/>
+          </a:xfrm>
+          <a:prstGeom prst="rect">
+            <a:avLst/>
+          </a:prstGeom>
+          <a:noFill/>
+        </p:spPr>
+        <p:txBody>
+          <a:bodyPr wrap="square">
+            <a:spAutoFit/>
+          </a:bodyPr>
+          <a:lstStyle/>
+          <a:p>
+            <a:pPr algn="ctr"/>
+            <a:r>
+              <a:rPr sz="2000" b="0" i="0">
+                <a:solidFill>
+                  <a:srgbClr val="828282"/>
+                </a:solidFill>
+                <a:latin typeface="Arial"/>
+              </a:rPr>
+              <a:t>永遠 の</a:t>
             </a:r>
           </a:p>
         </p:txBody>
@@ -6143,29 +6073,29 @@
         </p:nvSpPr>
         <p:spPr>
           <a:xfrm>
-            <a:off x="594360" y="4251960"/>
-            <a:ext cx="11002975" cy="347472"/>
-          </a:xfrm>
-          <a:prstGeom prst="rect">
-            <a:avLst/>
-          </a:prstGeom>
-          <a:noFill/>
-        </p:spPr>
-        <p:txBody>
-          <a:bodyPr wrap="square">
-            <a:spAutoFit/>
-          </a:bodyPr>
-          <a:lstStyle/>
-          <a:p>
-            <a:pPr algn="ctr"/>
-            <a:r>
-              <a:rPr sz="2200" b="0" i="1">
-                <a:solidFill>
-                  <a:srgbClr val="8C8C8C"/>
-                </a:solidFill>
-                <a:latin typeface="Arial"/>
-              </a:rPr>
-              <a:t/>
+            <a:off x="640080" y="4494276"/>
+            <a:ext cx="10911535" cy="310896"/>
+          </a:xfrm>
+          <a:prstGeom prst="rect">
+            <a:avLst/>
+          </a:prstGeom>
+          <a:noFill/>
+        </p:spPr>
+        <p:txBody>
+          <a:bodyPr wrap="square">
+            <a:spAutoFit/>
+          </a:bodyPr>
+          <a:lstStyle/>
+          <a:p>
+            <a:pPr algn="ctr"/>
+            <a:r>
+              <a:rPr sz="2000" b="0" i="0">
+                <a:solidFill>
+                  <a:srgbClr val="828282"/>
+                </a:solidFill>
+                <a:latin typeface="Arial"/>
+              </a:rPr>
+              <a:t>王なる主</a:t>
             </a:r>
           </a:p>
         </p:txBody>
@@ -6204,23 +6134,23 @@
         </p:nvSpPr>
         <p:spPr>
           <a:xfrm>
-            <a:off x="594360" y="2258568"/>
-            <a:ext cx="11002975" cy="685800"/>
-          </a:xfrm>
-          <a:prstGeom prst="rect">
-            <a:avLst/>
-          </a:prstGeom>
-          <a:noFill/>
-        </p:spPr>
-        <p:txBody>
-          <a:bodyPr wrap="square">
-            <a:spAutoFit/>
-          </a:bodyPr>
-          <a:lstStyle/>
-          <a:p>
-            <a:pPr algn="ctr"/>
-            <a:r>
-              <a:rPr sz="4400" b="1" i="0">
+            <a:off x="640080" y="2052828"/>
+            <a:ext cx="10911535" cy="731520"/>
+          </a:xfrm>
+          <a:prstGeom prst="rect">
+            <a:avLst/>
+          </a:prstGeom>
+          <a:noFill/>
+        </p:spPr>
+        <p:txBody>
+          <a:bodyPr wrap="square">
+            <a:spAutoFit/>
+          </a:bodyPr>
+          <a:lstStyle/>
+          <a:p>
+            <a:pPr algn="ctr"/>
+            <a:r>
+              <a:rPr sz="4800" b="1" i="0">
                 <a:solidFill>
                   <a:srgbClr val="FFFFFF"/>
                 </a:solidFill>
@@ -6239,29 +6169,29 @@
         </p:nvSpPr>
         <p:spPr>
           <a:xfrm>
-            <a:off x="594360" y="2980944"/>
-            <a:ext cx="11002975" cy="347472"/>
-          </a:xfrm>
-          <a:prstGeom prst="rect">
-            <a:avLst/>
-          </a:prstGeom>
-          <a:noFill/>
-        </p:spPr>
-        <p:txBody>
-          <a:bodyPr wrap="square">
-            <a:spAutoFit/>
-          </a:bodyPr>
-          <a:lstStyle/>
-          <a:p>
-            <a:pPr algn="ctr"/>
-            <a:r>
-              <a:rPr sz="2200" b="0" i="1">
-                <a:solidFill>
-                  <a:srgbClr val="8C8C8C"/>
-                </a:solidFill>
-                <a:latin typeface="Arial"/>
-              </a:rPr>
-              <a:t/>
+            <a:off x="640080" y="2985516"/>
+            <a:ext cx="10911535" cy="731520"/>
+          </a:xfrm>
+          <a:prstGeom prst="rect">
+            <a:avLst/>
+          </a:prstGeom>
+          <a:noFill/>
+        </p:spPr>
+        <p:txBody>
+          <a:bodyPr wrap="square">
+            <a:spAutoFit/>
+          </a:bodyPr>
+          <a:lstStyle/>
+          <a:p>
+            <a:pPr algn="ctr"/>
+            <a:r>
+              <a:rPr sz="4800" b="1" i="0">
+                <a:solidFill>
+                  <a:srgbClr val="FFFFFF"/>
+                </a:solidFill>
+                <a:latin typeface="Arial"/>
+              </a:rPr>
+              <a:t>Tudo que tenho é Teu</a:t>
             </a:r>
           </a:p>
         </p:txBody>
@@ -6274,29 +6204,29 @@
         </p:nvSpPr>
         <p:spPr>
           <a:xfrm>
-            <a:off x="594360" y="3529584"/>
-            <a:ext cx="11002975" cy="685800"/>
-          </a:xfrm>
-          <a:prstGeom prst="rect">
-            <a:avLst/>
-          </a:prstGeom>
-          <a:noFill/>
-        </p:spPr>
-        <p:txBody>
-          <a:bodyPr wrap="square">
-            <a:spAutoFit/>
-          </a:bodyPr>
-          <a:lstStyle/>
-          <a:p>
-            <a:pPr algn="ctr"/>
-            <a:r>
-              <a:rPr sz="4400" b="1" i="0">
-                <a:solidFill>
-                  <a:srgbClr val="FFFFFF"/>
-                </a:solidFill>
-                <a:latin typeface="Arial"/>
-              </a:rPr>
-              <a:t>Tudo que tenho é Teu</a:t>
+            <a:off x="640080" y="4128516"/>
+            <a:ext cx="10911535" cy="310896"/>
+          </a:xfrm>
+          <a:prstGeom prst="rect">
+            <a:avLst/>
+          </a:prstGeom>
+          <a:noFill/>
+        </p:spPr>
+        <p:txBody>
+          <a:bodyPr wrap="square">
+            <a:spAutoFit/>
+          </a:bodyPr>
+          <a:lstStyle/>
+          <a:p>
+            <a:pPr algn="ctr"/>
+            <a:r>
+              <a:rPr sz="2000" b="0" i="0">
+                <a:solidFill>
+                  <a:srgbClr val="828282"/>
+                </a:solidFill>
+                <a:latin typeface="Arial"/>
+              </a:rPr>
+              <a:t>あなただけに</a:t>
             </a:r>
           </a:p>
         </p:txBody>
@@ -6309,29 +6239,29 @@
         </p:nvSpPr>
         <p:spPr>
           <a:xfrm>
-            <a:off x="594360" y="4251960"/>
-            <a:ext cx="11002975" cy="347472"/>
-          </a:xfrm>
-          <a:prstGeom prst="rect">
-            <a:avLst/>
-          </a:prstGeom>
-          <a:noFill/>
-        </p:spPr>
-        <p:txBody>
-          <a:bodyPr wrap="square">
-            <a:spAutoFit/>
-          </a:bodyPr>
-          <a:lstStyle/>
-          <a:p>
-            <a:pPr algn="ctr"/>
-            <a:r>
-              <a:rPr sz="2200" b="0" i="1">
-                <a:solidFill>
-                  <a:srgbClr val="8C8C8C"/>
-                </a:solidFill>
-                <a:latin typeface="Arial"/>
-              </a:rPr>
-              <a:t/>
+            <a:off x="640080" y="4494276"/>
+            <a:ext cx="10911535" cy="310896"/>
+          </a:xfrm>
+          <a:prstGeom prst="rect">
+            <a:avLst/>
+          </a:prstGeom>
+          <a:noFill/>
+        </p:spPr>
+        <p:txBody>
+          <a:bodyPr wrap="square">
+            <a:spAutoFit/>
+          </a:bodyPr>
+          <a:lstStyle/>
+          <a:p>
+            <a:pPr algn="ctr"/>
+            <a:r>
+              <a:rPr sz="2000" b="0" i="0">
+                <a:solidFill>
+                  <a:srgbClr val="828282"/>
+                </a:solidFill>
+                <a:latin typeface="Arial"/>
+              </a:rPr>
+              <a:t>ささげたい</a:t>
             </a:r>
           </a:p>
         </p:txBody>
@@ -6370,23 +6300,23 @@
         </p:nvSpPr>
         <p:spPr>
           <a:xfrm>
-            <a:off x="594360" y="2258568"/>
-            <a:ext cx="11002975" cy="685800"/>
-          </a:xfrm>
-          <a:prstGeom prst="rect">
-            <a:avLst/>
-          </a:prstGeom>
-          <a:noFill/>
-        </p:spPr>
-        <p:txBody>
-          <a:bodyPr wrap="square">
-            <a:spAutoFit/>
-          </a:bodyPr>
-          <a:lstStyle/>
-          <a:p>
-            <a:pPr algn="ctr"/>
-            <a:r>
-              <a:rPr sz="4400" b="1" i="0">
+            <a:off x="640080" y="2052828"/>
+            <a:ext cx="10911535" cy="731520"/>
+          </a:xfrm>
+          <a:prstGeom prst="rect">
+            <a:avLst/>
+          </a:prstGeom>
+          <a:noFill/>
+        </p:spPr>
+        <p:txBody>
+          <a:bodyPr wrap="square">
+            <a:spAutoFit/>
+          </a:bodyPr>
+          <a:lstStyle/>
+          <a:p>
+            <a:pPr algn="ctr"/>
+            <a:r>
+              <a:rPr sz="4800" b="1" i="0">
                 <a:solidFill>
                   <a:srgbClr val="FFFFFF"/>
                 </a:solidFill>
@@ -6405,29 +6335,29 @@
         </p:nvSpPr>
         <p:spPr>
           <a:xfrm>
-            <a:off x="594360" y="2980944"/>
-            <a:ext cx="11002975" cy="347472"/>
-          </a:xfrm>
-          <a:prstGeom prst="rect">
-            <a:avLst/>
-          </a:prstGeom>
-          <a:noFill/>
-        </p:spPr>
-        <p:txBody>
-          <a:bodyPr wrap="square">
-            <a:spAutoFit/>
-          </a:bodyPr>
-          <a:lstStyle/>
-          <a:p>
-            <a:pPr algn="ctr"/>
-            <a:r>
-              <a:rPr sz="2200" b="0" i="1">
-                <a:solidFill>
-                  <a:srgbClr val="8C8C8C"/>
-                </a:solidFill>
-                <a:latin typeface="Arial"/>
-              </a:rPr>
-              <a:t/>
+            <a:off x="640080" y="2985516"/>
+            <a:ext cx="10911535" cy="731520"/>
+          </a:xfrm>
+          <a:prstGeom prst="rect">
+            <a:avLst/>
+          </a:prstGeom>
+          <a:noFill/>
+        </p:spPr>
+        <p:txBody>
+          <a:bodyPr wrap="square">
+            <a:spAutoFit/>
+          </a:bodyPr>
+          <a:lstStyle/>
+          <a:p>
+            <a:pPr algn="ctr"/>
+            <a:r>
+              <a:rPr sz="4800" b="1" i="0">
+                <a:solidFill>
+                  <a:srgbClr val="FFFFFF"/>
+                </a:solidFill>
+                <a:latin typeface="Arial"/>
+              </a:rPr>
+              <a:t>Ninguém poderia expressar</a:t>
             </a:r>
           </a:p>
         </p:txBody>
@@ -6440,29 +6370,29 @@
         </p:nvSpPr>
         <p:spPr>
           <a:xfrm>
-            <a:off x="594360" y="3529584"/>
-            <a:ext cx="11002975" cy="685800"/>
-          </a:xfrm>
-          <a:prstGeom prst="rect">
-            <a:avLst/>
-          </a:prstGeom>
-          <a:noFill/>
-        </p:spPr>
-        <p:txBody>
-          <a:bodyPr wrap="square">
-            <a:spAutoFit/>
-          </a:bodyPr>
-          <a:lstStyle/>
-          <a:p>
-            <a:pPr algn="ctr"/>
-            <a:r>
-              <a:rPr sz="4400" b="1" i="0">
-                <a:solidFill>
-                  <a:srgbClr val="FFFFFF"/>
-                </a:solidFill>
-                <a:latin typeface="Arial"/>
-              </a:rPr>
-              <a:t>Ninguém poderia expressar</a:t>
+            <a:off x="640080" y="4128516"/>
+            <a:ext cx="10911535" cy="310896"/>
+          </a:xfrm>
+          <a:prstGeom prst="rect">
+            <a:avLst/>
+          </a:prstGeom>
+          <a:noFill/>
+        </p:spPr>
+        <p:txBody>
+          <a:bodyPr wrap="square">
+            <a:spAutoFit/>
+          </a:bodyPr>
+          <a:lstStyle/>
+          <a:p>
+            <a:pPr algn="ctr"/>
+            <a:r>
+              <a:rPr sz="2000" b="0" i="0">
+                <a:solidFill>
+                  <a:srgbClr val="828282"/>
+                </a:solidFill>
+                <a:latin typeface="Arial"/>
+              </a:rPr>
+              <a:t>すべてを</a:t>
             </a:r>
           </a:p>
         </p:txBody>
@@ -6475,29 +6405,29 @@
         </p:nvSpPr>
         <p:spPr>
           <a:xfrm>
-            <a:off x="594360" y="4251960"/>
-            <a:ext cx="11002975" cy="347472"/>
-          </a:xfrm>
-          <a:prstGeom prst="rect">
-            <a:avLst/>
-          </a:prstGeom>
-          <a:noFill/>
-        </p:spPr>
-        <p:txBody>
-          <a:bodyPr wrap="square">
-            <a:spAutoFit/>
-          </a:bodyPr>
-          <a:lstStyle/>
-          <a:p>
-            <a:pPr algn="ctr"/>
-            <a:r>
-              <a:rPr sz="2200" b="0" i="1">
-                <a:solidFill>
-                  <a:srgbClr val="8C8C8C"/>
-                </a:solidFill>
-                <a:latin typeface="Arial"/>
-              </a:rPr>
-              <a:t/>
+            <a:off x="640080" y="4494276"/>
+            <a:ext cx="10911535" cy="310896"/>
+          </a:xfrm>
+          <a:prstGeom prst="rect">
+            <a:avLst/>
+          </a:prstGeom>
+          <a:noFill/>
+        </p:spPr>
+        <p:txBody>
+          <a:bodyPr wrap="square">
+            <a:spAutoFit/>
+          </a:bodyPr>
+          <a:lstStyle/>
+          <a:p>
+            <a:pPr algn="ctr"/>
+            <a:r>
+              <a:rPr sz="2000" b="0" i="0">
+                <a:solidFill>
+                  <a:srgbClr val="828282"/>
+                </a:solidFill>
+                <a:latin typeface="Arial"/>
+              </a:rPr>
+              <a:t>この息さえも</a:t>
             </a:r>
           </a:p>
         </p:txBody>
@@ -6536,23 +6466,23 @@
         </p:nvSpPr>
         <p:spPr>
           <a:xfrm>
-            <a:off x="594360" y="2258568"/>
-            <a:ext cx="11002975" cy="685800"/>
-          </a:xfrm>
-          <a:prstGeom prst="rect">
-            <a:avLst/>
-          </a:prstGeom>
-          <a:noFill/>
-        </p:spPr>
-        <p:txBody>
-          <a:bodyPr wrap="square">
-            <a:spAutoFit/>
-          </a:bodyPr>
-          <a:lstStyle/>
-          <a:p>
-            <a:pPr algn="ctr"/>
-            <a:r>
-              <a:rPr sz="4400" b="1" i="0">
+            <a:off x="640080" y="2052828"/>
+            <a:ext cx="10911535" cy="731520"/>
+          </a:xfrm>
+          <a:prstGeom prst="rect">
+            <a:avLst/>
+          </a:prstGeom>
+          <a:noFill/>
+        </p:spPr>
+        <p:txBody>
+          <a:bodyPr wrap="square">
+            <a:spAutoFit/>
+          </a:bodyPr>
+          <a:lstStyle/>
+          <a:p>
+            <a:pPr algn="ctr"/>
+            <a:r>
+              <a:rPr sz="4800" b="1" i="0">
                 <a:solidFill>
                   <a:srgbClr val="FFFFFF"/>
                 </a:solidFill>
@@ -6571,29 +6501,29 @@
         </p:nvSpPr>
         <p:spPr>
           <a:xfrm>
-            <a:off x="594360" y="2980944"/>
-            <a:ext cx="11002975" cy="347472"/>
-          </a:xfrm>
-          <a:prstGeom prst="rect">
-            <a:avLst/>
-          </a:prstGeom>
-          <a:noFill/>
-        </p:spPr>
-        <p:txBody>
-          <a:bodyPr wrap="square">
-            <a:spAutoFit/>
-          </a:bodyPr>
-          <a:lstStyle/>
-          <a:p>
-            <a:pPr algn="ctr"/>
-            <a:r>
-              <a:rPr sz="2200" b="0" i="1">
-                <a:solidFill>
-                  <a:srgbClr val="8C8C8C"/>
-                </a:solidFill>
-                <a:latin typeface="Arial"/>
-              </a:rPr>
-              <a:t/>
+            <a:off x="640080" y="2985516"/>
+            <a:ext cx="10911535" cy="731520"/>
+          </a:xfrm>
+          <a:prstGeom prst="rect">
+            <a:avLst/>
+          </a:prstGeom>
+          <a:noFill/>
+        </p:spPr>
+        <p:txBody>
+          <a:bodyPr wrap="square">
+            <a:spAutoFit/>
+          </a:bodyPr>
+          <a:lstStyle/>
+          <a:p>
+            <a:pPr algn="ctr"/>
+            <a:r>
+              <a:rPr sz="4800" b="1" i="0">
+                <a:solidFill>
+                  <a:srgbClr val="FFFFFF"/>
+                </a:solidFill>
+                <a:latin typeface="Arial"/>
+              </a:rPr>
+              <a:t>Algo que tenha valor</a:t>
             </a:r>
           </a:p>
         </p:txBody>
@@ -6606,29 +6536,29 @@
         </p:nvSpPr>
         <p:spPr>
           <a:xfrm>
-            <a:off x="594360" y="3529584"/>
-            <a:ext cx="11002975" cy="685800"/>
-          </a:xfrm>
-          <a:prstGeom prst="rect">
-            <a:avLst/>
-          </a:prstGeom>
-          <a:noFill/>
-        </p:spPr>
-        <p:txBody>
-          <a:bodyPr wrap="square">
-            <a:spAutoFit/>
-          </a:bodyPr>
-          <a:lstStyle/>
-          <a:p>
-            <a:pPr algn="ctr"/>
-            <a:r>
-              <a:rPr sz="4400" b="1" i="0">
-                <a:solidFill>
-                  <a:srgbClr val="FFFFFF"/>
-                </a:solidFill>
-                <a:latin typeface="Arial"/>
-              </a:rPr>
-              <a:t>Algo que tenha valor</a:t>
+            <a:off x="640080" y="4128516"/>
+            <a:ext cx="10911535" cy="310896"/>
+          </a:xfrm>
+          <a:prstGeom prst="rect">
+            <a:avLst/>
+          </a:prstGeom>
+          <a:noFill/>
+        </p:spPr>
+        <p:txBody>
+          <a:bodyPr wrap="square">
+            <a:spAutoFit/>
+          </a:bodyPr>
+          <a:lstStyle/>
+          <a:p>
+            <a:pPr algn="ctr"/>
+            <a:r>
+              <a:rPr sz="2000" b="0" i="0">
+                <a:solidFill>
+                  <a:srgbClr val="828282"/>
+                </a:solidFill>
+                <a:latin typeface="Arial"/>
+              </a:rPr>
+              <a:t>あなたへと</a:t>
             </a:r>
           </a:p>
         </p:txBody>
@@ -6641,29 +6571,29 @@
         </p:nvSpPr>
         <p:spPr>
           <a:xfrm>
-            <a:off x="594360" y="4251960"/>
-            <a:ext cx="11002975" cy="347472"/>
-          </a:xfrm>
-          <a:prstGeom prst="rect">
-            <a:avLst/>
-          </a:prstGeom>
-          <a:noFill/>
-        </p:spPr>
-        <p:txBody>
-          <a:bodyPr wrap="square">
-            <a:spAutoFit/>
-          </a:bodyPr>
-          <a:lstStyle/>
-          <a:p>
-            <a:pPr algn="ctr"/>
-            <a:r>
-              <a:rPr sz="2200" b="0" i="1">
-                <a:solidFill>
-                  <a:srgbClr val="8C8C8C"/>
-                </a:solidFill>
-                <a:latin typeface="Arial"/>
-              </a:rPr>
-              <a:t/>
+            <a:off x="640080" y="4494276"/>
+            <a:ext cx="10911535" cy="310896"/>
+          </a:xfrm>
+          <a:prstGeom prst="rect">
+            <a:avLst/>
+          </a:prstGeom>
+          <a:noFill/>
+        </p:spPr>
+        <p:txBody>
+          <a:bodyPr wrap="square">
+            <a:spAutoFit/>
+          </a:bodyPr>
+          <a:lstStyle/>
+          <a:p>
+            <a:pPr algn="ctr"/>
+            <a:r>
+              <a:rPr sz="2000" b="0" i="0">
+                <a:solidFill>
+                  <a:srgbClr val="828282"/>
+                </a:solidFill>
+                <a:latin typeface="Arial"/>
+              </a:rPr>
+              <a:t>届けたい</a:t>
             </a:r>
           </a:p>
         </p:txBody>
@@ -6702,23 +6632,23 @@
         </p:nvSpPr>
         <p:spPr>
           <a:xfrm>
-            <a:off x="594360" y="1837944"/>
-            <a:ext cx="11002975" cy="685800"/>
-          </a:xfrm>
-          <a:prstGeom prst="rect">
-            <a:avLst/>
-          </a:prstGeom>
-          <a:noFill/>
-        </p:spPr>
-        <p:txBody>
-          <a:bodyPr wrap="square">
-            <a:spAutoFit/>
-          </a:bodyPr>
-          <a:lstStyle/>
-          <a:p>
-            <a:pPr algn="ctr"/>
-            <a:r>
-              <a:rPr sz="4400" b="1" i="0">
+            <a:off x="640080" y="1650492"/>
+            <a:ext cx="10911535" cy="731520"/>
+          </a:xfrm>
+          <a:prstGeom prst="rect">
+            <a:avLst/>
+          </a:prstGeom>
+          <a:noFill/>
+        </p:spPr>
+        <p:txBody>
+          <a:bodyPr wrap="square">
+            <a:spAutoFit/>
+          </a:bodyPr>
+          <a:lstStyle/>
+          <a:p>
+            <a:pPr algn="ctr"/>
+            <a:r>
+              <a:rPr sz="4800" b="1" i="0">
                 <a:solidFill>
                   <a:srgbClr val="FFFFFF"/>
                 </a:solidFill>
@@ -6737,8 +6667,8 @@
         </p:nvSpPr>
         <p:spPr>
           <a:xfrm>
-            <a:off x="594360" y="2560320"/>
-            <a:ext cx="11002975" cy="384048"/>
+            <a:off x="640080" y="2418588"/>
+            <a:ext cx="10911535" cy="365760"/>
           </a:xfrm>
           <a:prstGeom prst="rect">
             <a:avLst/>
@@ -6755,7 +6685,7 @@
             <a:r>
               <a:rPr sz="2400" b="0" i="1">
                 <a:solidFill>
-                  <a:srgbClr val="B4B4B4"/>
+                  <a:srgbClr val="AAAAAA"/>
                 </a:solidFill>
                 <a:latin typeface="Arial"/>
               </a:rPr>
@@ -6772,8 +6702,78 @@
         </p:nvSpPr>
         <p:spPr>
           <a:xfrm>
-            <a:off x="594360" y="2980944"/>
-            <a:ext cx="11002975" cy="347472"/>
+            <a:off x="640080" y="2985516"/>
+            <a:ext cx="10911535" cy="731520"/>
+          </a:xfrm>
+          <a:prstGeom prst="rect">
+            <a:avLst/>
+          </a:prstGeom>
+          <a:noFill/>
+        </p:spPr>
+        <p:txBody>
+          <a:bodyPr wrap="square">
+            <a:spAutoFit/>
+          </a:bodyPr>
+          <a:lstStyle/>
+          <a:p>
+            <a:pPr algn="ctr"/>
+            <a:r>
+              <a:rPr sz="4800" b="1" i="0">
+                <a:solidFill>
+                  <a:srgbClr val="FFFFFF"/>
+                </a:solidFill>
+                <a:latin typeface="Arial"/>
+              </a:rPr>
+              <a:t>静 寂 の</a:t>
+            </a:r>
+          </a:p>
+        </p:txBody>
+      </p:sp>
+      <p:sp>
+        <p:nvSpPr>
+          <p:cNvPr id="5" name="TextBox 4"/>
+          <p:cNvSpPr txBox="1"/>
+          <p:nvPr/>
+        </p:nvSpPr>
+        <p:spPr>
+          <a:xfrm>
+            <a:off x="640080" y="3753612"/>
+            <a:ext cx="10911535" cy="365760"/>
+          </a:xfrm>
+          <a:prstGeom prst="rect">
+            <a:avLst/>
+          </a:prstGeom>
+          <a:noFill/>
+        </p:spPr>
+        <p:txBody>
+          <a:bodyPr wrap="square">
+            <a:spAutoFit/>
+          </a:bodyPr>
+          <a:lstStyle/>
+          <a:p>
+            <a:pPr algn="ctr"/>
+            <a:r>
+              <a:rPr sz="2400" b="0" i="1">
+                <a:solidFill>
+                  <a:srgbClr val="AAAAAA"/>
+                </a:solidFill>
+                <a:latin typeface="Arial"/>
+              </a:rPr>
+              <a:t>seijakuno</a:t>
+            </a:r>
+          </a:p>
+        </p:txBody>
+      </p:sp>
+      <p:sp>
+        <p:nvSpPr>
+          <p:cNvPr id="6" name="TextBox 5"/>
+          <p:cNvSpPr txBox="1"/>
+          <p:nvPr/>
+        </p:nvSpPr>
+        <p:spPr>
+          <a:xfrm>
+            <a:off x="640080" y="4530852"/>
+            <a:ext cx="10911535" cy="310896"/>
           </a:xfrm>
           <a:prstGeom prst="rect">
             <a:avLst/>
@@ -6790,81 +6790,11 @@
             <a:r>
               <a:rPr sz="2000" b="0" i="1">
                 <a:solidFill>
-                  <a:srgbClr val="8C8C8C"/>
-                </a:solidFill>
-                <a:latin typeface="Arial"/>
-              </a:rPr>
-              <a:t/>
-            </a:r>
-          </a:p>
-        </p:txBody>
-      </p:sp>
-      <p:sp>
-        <p:nvSpPr>
-          <p:cNvPr id="5" name="TextBox 4"/>
-          <p:cNvSpPr txBox="1"/>
-          <p:nvPr/>
-        </p:nvSpPr>
-        <p:spPr>
-          <a:xfrm>
-            <a:off x="594360" y="3529584"/>
-            <a:ext cx="11002975" cy="685800"/>
-          </a:xfrm>
-          <a:prstGeom prst="rect">
-            <a:avLst/>
-          </a:prstGeom>
-          <a:noFill/>
-        </p:spPr>
-        <p:txBody>
-          <a:bodyPr wrap="square">
-            <a:spAutoFit/>
-          </a:bodyPr>
-          <a:lstStyle/>
-          <a:p>
-            <a:pPr algn="ctr"/>
-            <a:r>
-              <a:rPr sz="4400" b="1" i="0">
-                <a:solidFill>
-                  <a:srgbClr val="FFFFFF"/>
-                </a:solidFill>
-                <a:latin typeface="Arial"/>
-              </a:rPr>
-              <a:t>静 寂 の</a:t>
-            </a:r>
-          </a:p>
-        </p:txBody>
-      </p:sp>
-      <p:sp>
-        <p:nvSpPr>
-          <p:cNvPr id="6" name="TextBox 5"/>
-          <p:cNvSpPr txBox="1"/>
-          <p:nvPr/>
-        </p:nvSpPr>
-        <p:spPr>
-          <a:xfrm>
-            <a:off x="594360" y="4251960"/>
-            <a:ext cx="11002975" cy="384048"/>
-          </a:xfrm>
-          <a:prstGeom prst="rect">
-            <a:avLst/>
-          </a:prstGeom>
-          <a:noFill/>
-        </p:spPr>
-        <p:txBody>
-          <a:bodyPr wrap="square">
-            <a:spAutoFit/>
-          </a:bodyPr>
-          <a:lstStyle/>
-          <a:p>
-            <a:pPr algn="ctr"/>
-            <a:r>
-              <a:rPr sz="2400" b="0" i="1">
-                <a:solidFill>
-                  <a:srgbClr val="B4B4B4"/>
-                </a:solidFill>
-                <a:latin typeface="Arial"/>
-              </a:rPr>
-              <a:t>seijakuno</a:t>
+                  <a:srgbClr val="828282"/>
+                </a:solidFill>
+                <a:latin typeface="Arial"/>
+              </a:rPr>
+              <a:t>A Essência da Adoração</a:t>
             </a:r>
           </a:p>
         </p:txBody>
@@ -6877,8 +6807,8 @@
         </p:nvSpPr>
         <p:spPr>
           <a:xfrm>
-            <a:off x="594360" y="4672584"/>
-            <a:ext cx="11002975" cy="347472"/>
+            <a:off x="640080" y="4896612"/>
+            <a:ext cx="10911535" cy="310896"/>
           </a:xfrm>
           <a:prstGeom prst="rect">
             <a:avLst/>
@@ -6895,11 +6825,11 @@
             <a:r>
               <a:rPr sz="2000" b="0" i="1">
                 <a:solidFill>
-                  <a:srgbClr val="8C8C8C"/>
-                </a:solidFill>
-                <a:latin typeface="Arial"/>
-              </a:rPr>
-              <a:t/>
+                  <a:srgbClr val="828282"/>
+                </a:solidFill>
+                <a:latin typeface="Arial"/>
+              </a:rPr>
+              <a:t>Quando a música para</a:t>
             </a:r>
           </a:p>
         </p:txBody>
@@ -6938,23 +6868,23 @@
         </p:nvSpPr>
         <p:spPr>
           <a:xfrm>
-            <a:off x="594360" y="1837944"/>
-            <a:ext cx="11002975" cy="685800"/>
-          </a:xfrm>
-          <a:prstGeom prst="rect">
-            <a:avLst/>
-          </a:prstGeom>
-          <a:noFill/>
-        </p:spPr>
-        <p:txBody>
-          <a:bodyPr wrap="square">
-            <a:spAutoFit/>
-          </a:bodyPr>
-          <a:lstStyle/>
-          <a:p>
-            <a:pPr algn="ctr"/>
-            <a:r>
-              <a:rPr sz="4400" b="1" i="0">
+            <a:off x="640080" y="1650492"/>
+            <a:ext cx="10911535" cy="731520"/>
+          </a:xfrm>
+          <a:prstGeom prst="rect">
+            <a:avLst/>
+          </a:prstGeom>
+          <a:noFill/>
+        </p:spPr>
+        <p:txBody>
+          <a:bodyPr wrap="square">
+            <a:spAutoFit/>
+          </a:bodyPr>
+          <a:lstStyle/>
+          <a:p>
+            <a:pPr algn="ctr"/>
+            <a:r>
+              <a:rPr sz="4800" b="1" i="0">
                 <a:solidFill>
                   <a:srgbClr val="FFFFFF"/>
                 </a:solidFill>
@@ -6973,8 +6903,8 @@
         </p:nvSpPr>
         <p:spPr>
           <a:xfrm>
-            <a:off x="594360" y="2560320"/>
-            <a:ext cx="11002975" cy="384048"/>
+            <a:off x="640080" y="2418588"/>
+            <a:ext cx="10911535" cy="365760"/>
           </a:xfrm>
           <a:prstGeom prst="rect">
             <a:avLst/>
@@ -6991,7 +6921,7 @@
             <a:r>
               <a:rPr sz="2400" b="0" i="1">
                 <a:solidFill>
-                  <a:srgbClr val="B4B4B4"/>
+                  <a:srgbClr val="AAAAAA"/>
                 </a:solidFill>
                 <a:latin typeface="Arial"/>
               </a:rPr>
@@ -7008,8 +6938,78 @@
         </p:nvSpPr>
         <p:spPr>
           <a:xfrm>
-            <a:off x="594360" y="2980944"/>
-            <a:ext cx="11002975" cy="347472"/>
+            <a:off x="640080" y="2985516"/>
+            <a:ext cx="10911535" cy="731520"/>
+          </a:xfrm>
+          <a:prstGeom prst="rect">
+            <a:avLst/>
+          </a:prstGeom>
+          <a:noFill/>
+        </p:spPr>
+        <p:txBody>
+          <a:bodyPr wrap="square">
+            <a:spAutoFit/>
+          </a:bodyPr>
+          <a:lstStyle/>
+          <a:p>
+            <a:pPr algn="ctr"/>
+            <a:r>
+              <a:rPr sz="4800" b="1" i="0">
+                <a:solidFill>
+                  <a:srgbClr val="FFFFFF"/>
+                </a:solidFill>
+                <a:latin typeface="Arial"/>
+              </a:rPr>
+              <a:t>よろこびを</a:t>
+            </a:r>
+          </a:p>
+        </p:txBody>
+      </p:sp>
+      <p:sp>
+        <p:nvSpPr>
+          <p:cNvPr id="5" name="TextBox 4"/>
+          <p:cNvSpPr txBox="1"/>
+          <p:nvPr/>
+        </p:nvSpPr>
+        <p:spPr>
+          <a:xfrm>
+            <a:off x="640080" y="3753612"/>
+            <a:ext cx="10911535" cy="365760"/>
+          </a:xfrm>
+          <a:prstGeom prst="rect">
+            <a:avLst/>
+          </a:prstGeom>
+          <a:noFill/>
+        </p:spPr>
+        <p:txBody>
+          <a:bodyPr wrap="square">
+            <a:spAutoFit/>
+          </a:bodyPr>
+          <a:lstStyle/>
+          <a:p>
+            <a:pPr algn="ctr"/>
+            <a:r>
+              <a:rPr sz="2400" b="0" i="1">
+                <a:solidFill>
+                  <a:srgbClr val="AAAAAA"/>
+                </a:solidFill>
+                <a:latin typeface="Arial"/>
+              </a:rPr>
+              <a:t>Yorokobi wo</a:t>
+            </a:r>
+          </a:p>
+        </p:txBody>
+      </p:sp>
+      <p:sp>
+        <p:nvSpPr>
+          <p:cNvPr id="6" name="TextBox 5"/>
+          <p:cNvSpPr txBox="1"/>
+          <p:nvPr/>
+        </p:nvSpPr>
+        <p:spPr>
+          <a:xfrm>
+            <a:off x="640080" y="4530852"/>
+            <a:ext cx="10911535" cy="310896"/>
           </a:xfrm>
           <a:prstGeom prst="rect">
             <a:avLst/>
@@ -7026,81 +7026,11 @@
             <a:r>
               <a:rPr sz="2000" b="0" i="1">
                 <a:solidFill>
-                  <a:srgbClr val="8C8C8C"/>
-                </a:solidFill>
-                <a:latin typeface="Arial"/>
-              </a:rPr>
-              <a:t/>
-            </a:r>
-          </a:p>
-        </p:txBody>
-      </p:sp>
-      <p:sp>
-        <p:nvSpPr>
-          <p:cNvPr id="5" name="TextBox 4"/>
-          <p:cNvSpPr txBox="1"/>
-          <p:nvPr/>
-        </p:nvSpPr>
-        <p:spPr>
-          <a:xfrm>
-            <a:off x="594360" y="3529584"/>
-            <a:ext cx="11002975" cy="685800"/>
-          </a:xfrm>
-          <a:prstGeom prst="rect">
-            <a:avLst/>
-          </a:prstGeom>
-          <a:noFill/>
-        </p:spPr>
-        <p:txBody>
-          <a:bodyPr wrap="square">
-            <a:spAutoFit/>
-          </a:bodyPr>
-          <a:lstStyle/>
-          <a:p>
-            <a:pPr algn="ctr"/>
-            <a:r>
-              <a:rPr sz="4400" b="1" i="0">
-                <a:solidFill>
-                  <a:srgbClr val="FFFFFF"/>
-                </a:solidFill>
-                <a:latin typeface="Arial"/>
-              </a:rPr>
-              <a:t>よろこびを</a:t>
-            </a:r>
-          </a:p>
-        </p:txBody>
-      </p:sp>
-      <p:sp>
-        <p:nvSpPr>
-          <p:cNvPr id="6" name="TextBox 5"/>
-          <p:cNvSpPr txBox="1"/>
-          <p:nvPr/>
-        </p:nvSpPr>
-        <p:spPr>
-          <a:xfrm>
-            <a:off x="594360" y="4251960"/>
-            <a:ext cx="11002975" cy="384048"/>
-          </a:xfrm>
-          <a:prstGeom prst="rect">
-            <a:avLst/>
-          </a:prstGeom>
-          <a:noFill/>
-        </p:spPr>
-        <p:txBody>
-          <a:bodyPr wrap="square">
-            <a:spAutoFit/>
-          </a:bodyPr>
-          <a:lstStyle/>
-          <a:p>
-            <a:pPr algn="ctr"/>
-            <a:r>
-              <a:rPr sz="2400" b="0" i="1">
-                <a:solidFill>
-                  <a:srgbClr val="B4B4B4"/>
-                </a:solidFill>
-                <a:latin typeface="Arial"/>
-              </a:rPr>
-              <a:t>Yorokobi wo</a:t>
+                  <a:srgbClr val="828282"/>
+                </a:solidFill>
+                <a:latin typeface="Arial"/>
+              </a:rPr>
+              <a:t>E tudo é tirado</a:t>
             </a:r>
           </a:p>
         </p:txBody>
@@ -7113,8 +7043,8 @@
         </p:nvSpPr>
         <p:spPr>
           <a:xfrm>
-            <a:off x="594360" y="4672584"/>
-            <a:ext cx="11002975" cy="347472"/>
+            <a:off x="640080" y="4896612"/>
+            <a:ext cx="10911535" cy="310896"/>
           </a:xfrm>
           <a:prstGeom prst="rect">
             <a:avLst/>
@@ -7131,11 +7061,11 @@
             <a:r>
               <a:rPr sz="2000" b="0" i="1">
                 <a:solidFill>
-                  <a:srgbClr val="8C8C8C"/>
-                </a:solidFill>
-                <a:latin typeface="Arial"/>
-              </a:rPr>
-              <a:t/>
+                  <a:srgbClr val="828282"/>
+                </a:solidFill>
+                <a:latin typeface="Arial"/>
+              </a:rPr>
+              <a:t>E eu simplesmente venho</a:t>
             </a:r>
           </a:p>
         </p:txBody>
@@ -7174,23 +7104,23 @@
         </p:nvSpPr>
         <p:spPr>
           <a:xfrm>
-            <a:off x="594360" y="1837944"/>
-            <a:ext cx="11002975" cy="685800"/>
-          </a:xfrm>
-          <a:prstGeom prst="rect">
-            <a:avLst/>
-          </a:prstGeom>
-          <a:noFill/>
-        </p:spPr>
-        <p:txBody>
-          <a:bodyPr wrap="square">
-            <a:spAutoFit/>
-          </a:bodyPr>
-          <a:lstStyle/>
-          <a:p>
-            <a:pPr algn="ctr"/>
-            <a:r>
-              <a:rPr sz="4400" b="1" i="0">
+            <a:off x="640080" y="1650492"/>
+            <a:ext cx="10911535" cy="731520"/>
+          </a:xfrm>
+          <a:prstGeom prst="rect">
+            <a:avLst/>
+          </a:prstGeom>
+          <a:noFill/>
+        </p:spPr>
+        <p:txBody>
+          <a:bodyPr wrap="square">
+            <a:spAutoFit/>
+          </a:bodyPr>
+          <a:lstStyle/>
+          <a:p>
+            <a:pPr algn="ctr"/>
+            <a:r>
+              <a:rPr sz="4800" b="1" i="0">
                 <a:solidFill>
                   <a:srgbClr val="FFFFFF"/>
                 </a:solidFill>
@@ -7209,8 +7139,8 @@
         </p:nvSpPr>
         <p:spPr>
           <a:xfrm>
-            <a:off x="594360" y="2560320"/>
-            <a:ext cx="11002975" cy="384048"/>
+            <a:off x="640080" y="2418588"/>
+            <a:ext cx="10911535" cy="365760"/>
           </a:xfrm>
           <a:prstGeom prst="rect">
             <a:avLst/>
@@ -7227,7 +7157,7 @@
             <a:r>
               <a:rPr sz="2400" b="0" i="1">
                 <a:solidFill>
-                  <a:srgbClr val="B4B4B4"/>
+                  <a:srgbClr val="AAAAAA"/>
                 </a:solidFill>
                 <a:latin typeface="Arial"/>
               </a:rPr>
@@ -7244,8 +7174,78 @@
         </p:nvSpPr>
         <p:spPr>
           <a:xfrm>
-            <a:off x="594360" y="2980944"/>
-            <a:ext cx="11002975" cy="347472"/>
+            <a:off x="640080" y="2985516"/>
+            <a:ext cx="10911535" cy="731520"/>
+          </a:xfrm>
+          <a:prstGeom prst="rect">
+            <a:avLst/>
+          </a:prstGeom>
+          <a:noFill/>
+        </p:spPr>
+        <p:txBody>
+          <a:bodyPr wrap="square">
+            <a:spAutoFit/>
+          </a:bodyPr>
+          <a:lstStyle/>
+          <a:p>
+            <a:pPr algn="ctr"/>
+            <a:r>
+              <a:rPr sz="4800" b="1" i="0">
+                <a:solidFill>
+                  <a:srgbClr val="FFFFFF"/>
+                </a:solidFill>
+                <a:latin typeface="Arial"/>
+              </a:rPr>
+              <a:t>届けたい</a:t>
+            </a:r>
+          </a:p>
+        </p:txBody>
+      </p:sp>
+      <p:sp>
+        <p:nvSpPr>
+          <p:cNvPr id="5" name="TextBox 4"/>
+          <p:cNvSpPr txBox="1"/>
+          <p:nvPr/>
+        </p:nvSpPr>
+        <p:spPr>
+          <a:xfrm>
+            <a:off x="640080" y="3753612"/>
+            <a:ext cx="10911535" cy="365760"/>
+          </a:xfrm>
+          <a:prstGeom prst="rect">
+            <a:avLst/>
+          </a:prstGeom>
+          <a:noFill/>
+        </p:spPr>
+        <p:txBody>
+          <a:bodyPr wrap="square">
+            <a:spAutoFit/>
+          </a:bodyPr>
+          <a:lstStyle/>
+          <a:p>
+            <a:pPr algn="ctr"/>
+            <a:r>
+              <a:rPr sz="2400" b="0" i="1">
+                <a:solidFill>
+                  <a:srgbClr val="AAAAAA"/>
+                </a:solidFill>
+                <a:latin typeface="Arial"/>
+              </a:rPr>
+              <a:t>Todoketai</a:t>
+            </a:r>
+          </a:p>
+        </p:txBody>
+      </p:sp>
+      <p:sp>
+        <p:nvSpPr>
+          <p:cNvPr id="6" name="TextBox 5"/>
+          <p:cNvSpPr txBox="1"/>
+          <p:nvPr/>
+        </p:nvSpPr>
+        <p:spPr>
+          <a:xfrm>
+            <a:off x="640080" y="4530852"/>
+            <a:ext cx="10911535" cy="310896"/>
           </a:xfrm>
           <a:prstGeom prst="rect">
             <a:avLst/>
@@ -7262,81 +7262,11 @@
             <a:r>
               <a:rPr sz="2000" b="0" i="1">
                 <a:solidFill>
-                  <a:srgbClr val="8C8C8C"/>
-                </a:solidFill>
-                <a:latin typeface="Arial"/>
-              </a:rPr>
-              <a:t/>
-            </a:r>
-          </a:p>
-        </p:txBody>
-      </p:sp>
-      <p:sp>
-        <p:nvSpPr>
-          <p:cNvPr id="5" name="TextBox 4"/>
-          <p:cNvSpPr txBox="1"/>
-          <p:nvPr/>
-        </p:nvSpPr>
-        <p:spPr>
-          <a:xfrm>
-            <a:off x="594360" y="3529584"/>
-            <a:ext cx="11002975" cy="685800"/>
-          </a:xfrm>
-          <a:prstGeom prst="rect">
-            <a:avLst/>
-          </a:prstGeom>
-          <a:noFill/>
-        </p:spPr>
-        <p:txBody>
-          <a:bodyPr wrap="square">
-            <a:spAutoFit/>
-          </a:bodyPr>
-          <a:lstStyle/>
-          <a:p>
-            <a:pPr algn="ctr"/>
-            <a:r>
-              <a:rPr sz="4400" b="1" i="0">
-                <a:solidFill>
-                  <a:srgbClr val="FFFFFF"/>
-                </a:solidFill>
-                <a:latin typeface="Arial"/>
-              </a:rPr>
-              <a:t>届けたい</a:t>
-            </a:r>
-          </a:p>
-        </p:txBody>
-      </p:sp>
-      <p:sp>
-        <p:nvSpPr>
-          <p:cNvPr id="6" name="TextBox 5"/>
-          <p:cNvSpPr txBox="1"/>
-          <p:nvPr/>
-        </p:nvSpPr>
-        <p:spPr>
-          <a:xfrm>
-            <a:off x="594360" y="4251960"/>
-            <a:ext cx="11002975" cy="384048"/>
-          </a:xfrm>
-          <a:prstGeom prst="rect">
-            <a:avLst/>
-          </a:prstGeom>
-          <a:noFill/>
-        </p:spPr>
-        <p:txBody>
-          <a:bodyPr wrap="square">
-            <a:spAutoFit/>
-          </a:bodyPr>
-          <a:lstStyle/>
-          <a:p>
-            <a:pPr algn="ctr"/>
-            <a:r>
-              <a:rPr sz="2400" b="0" i="1">
-                <a:solidFill>
-                  <a:srgbClr val="B4B4B4"/>
-                </a:solidFill>
-                <a:latin typeface="Arial"/>
-              </a:rPr>
-              <a:t>Todoketai</a:t>
+                  <a:srgbClr val="828282"/>
+                </a:solidFill>
+                <a:latin typeface="Arial"/>
+              </a:rPr>
+              <a:t>Querendo trazer apenas</a:t>
             </a:r>
           </a:p>
         </p:txBody>
@@ -7349,8 +7279,8 @@
         </p:nvSpPr>
         <p:spPr>
           <a:xfrm>
-            <a:off x="594360" y="4672584"/>
-            <a:ext cx="11002975" cy="347472"/>
+            <a:off x="640080" y="4896612"/>
+            <a:ext cx="10911535" cy="310896"/>
           </a:xfrm>
           <a:prstGeom prst="rect">
             <a:avLst/>
@@ -7367,11 +7297,11 @@
             <a:r>
               <a:rPr sz="2000" b="0" i="1">
                 <a:solidFill>
-                  <a:srgbClr val="8C8C8C"/>
-                </a:solidFill>
-                <a:latin typeface="Arial"/>
-              </a:rPr>
-              <a:t/>
+                  <a:srgbClr val="828282"/>
+                </a:solidFill>
+                <a:latin typeface="Arial"/>
+              </a:rPr>
+              <a:t>Algo que tenha valor</a:t>
             </a:r>
           </a:p>
         </p:txBody>
@@ -7410,23 +7340,23 @@
         </p:nvSpPr>
         <p:spPr>
           <a:xfrm>
-            <a:off x="594360" y="1837944"/>
-            <a:ext cx="11002975" cy="685800"/>
-          </a:xfrm>
-          <a:prstGeom prst="rect">
-            <a:avLst/>
-          </a:prstGeom>
-          <a:noFill/>
-        </p:spPr>
-        <p:txBody>
-          <a:bodyPr wrap="square">
-            <a:spAutoFit/>
-          </a:bodyPr>
-          <a:lstStyle/>
-          <a:p>
-            <a:pPr algn="ctr"/>
-            <a:r>
-              <a:rPr sz="4400" b="1" i="0">
+            <a:off x="640080" y="1650492"/>
+            <a:ext cx="10911535" cy="731520"/>
+          </a:xfrm>
+          <a:prstGeom prst="rect">
+            <a:avLst/>
+          </a:prstGeom>
+          <a:noFill/>
+        </p:spPr>
+        <p:txBody>
+          <a:bodyPr wrap="square">
+            <a:spAutoFit/>
+          </a:bodyPr>
+          <a:lstStyle/>
+          <a:p>
+            <a:pPr algn="ctr"/>
+            <a:r>
+              <a:rPr sz="4800" b="1" i="0">
                 <a:solidFill>
                   <a:srgbClr val="FFFFFF"/>
                 </a:solidFill>
@@ -7445,8 +7375,8 @@
         </p:nvSpPr>
         <p:spPr>
           <a:xfrm>
-            <a:off x="594360" y="2560320"/>
-            <a:ext cx="11002975" cy="384048"/>
+            <a:off x="640080" y="2418588"/>
+            <a:ext cx="10911535" cy="365760"/>
           </a:xfrm>
           <a:prstGeom prst="rect">
             <a:avLst/>
@@ -7463,7 +7393,7 @@
             <a:r>
               <a:rPr sz="2400" b="0" i="1">
                 <a:solidFill>
-                  <a:srgbClr val="B4B4B4"/>
+                  <a:srgbClr val="AAAAAA"/>
                 </a:solidFill>
                 <a:latin typeface="Arial"/>
               </a:rPr>
@@ -7480,8 +7410,78 @@
         </p:nvSpPr>
         <p:spPr>
           <a:xfrm>
-            <a:off x="594360" y="2980944"/>
-            <a:ext cx="11002975" cy="347472"/>
+            <a:off x="640080" y="2985516"/>
+            <a:ext cx="10911535" cy="731520"/>
+          </a:xfrm>
+          <a:prstGeom prst="rect">
+            <a:avLst/>
+          </a:prstGeom>
+          <a:noFill/>
+        </p:spPr>
+        <p:txBody>
+          <a:bodyPr wrap="square">
+            <a:spAutoFit/>
+          </a:bodyPr>
+          <a:lstStyle/>
+          <a:p>
+            <a:pPr algn="ctr"/>
+            <a:r>
+              <a:rPr sz="4800" b="1" i="0">
+                <a:solidFill>
+                  <a:srgbClr val="FFFFFF"/>
+                </a:solidFill>
+                <a:latin typeface="Arial"/>
+              </a:rPr>
+              <a:t>いるものは</a:t>
+            </a:r>
+          </a:p>
+        </p:txBody>
+      </p:sp>
+      <p:sp>
+        <p:nvSpPr>
+          <p:cNvPr id="5" name="TextBox 4"/>
+          <p:cNvSpPr txBox="1"/>
+          <p:nvPr/>
+        </p:nvSpPr>
+        <p:spPr>
+          <a:xfrm>
+            <a:off x="640080" y="3753612"/>
+            <a:ext cx="10911535" cy="365760"/>
+          </a:xfrm>
+          <a:prstGeom prst="rect">
+            <a:avLst/>
+          </a:prstGeom>
+          <a:noFill/>
+        </p:spPr>
+        <p:txBody>
+          <a:bodyPr wrap="square">
+            <a:spAutoFit/>
+          </a:bodyPr>
+          <a:lstStyle/>
+          <a:p>
+            <a:pPr algn="ctr"/>
+            <a:r>
+              <a:rPr sz="2400" b="0" i="1">
+                <a:solidFill>
+                  <a:srgbClr val="AAAAAA"/>
+                </a:solidFill>
+                <a:latin typeface="Arial"/>
+              </a:rPr>
+              <a:t>iru mono ha</a:t>
+            </a:r>
+          </a:p>
+        </p:txBody>
+      </p:sp>
+      <p:sp>
+        <p:nvSpPr>
+          <p:cNvPr id="6" name="TextBox 5"/>
+          <p:cNvSpPr txBox="1"/>
+          <p:nvPr/>
+        </p:nvSpPr>
+        <p:spPr>
+          <a:xfrm>
+            <a:off x="640080" y="4530852"/>
+            <a:ext cx="10911535" cy="310896"/>
           </a:xfrm>
           <a:prstGeom prst="rect">
             <a:avLst/>
@@ -7498,81 +7498,11 @@
             <a:r>
               <a:rPr sz="2000" b="0" i="1">
                 <a:solidFill>
-                  <a:srgbClr val="8C8C8C"/>
-                </a:solidFill>
-                <a:latin typeface="Arial"/>
-              </a:rPr>
-              <a:t/>
-            </a:r>
-          </a:p>
-        </p:txBody>
-      </p:sp>
-      <p:sp>
-        <p:nvSpPr>
-          <p:cNvPr id="5" name="TextBox 4"/>
-          <p:cNvSpPr txBox="1"/>
-          <p:nvPr/>
-        </p:nvSpPr>
-        <p:spPr>
-          <a:xfrm>
-            <a:off x="594360" y="3529584"/>
-            <a:ext cx="11002975" cy="685800"/>
-          </a:xfrm>
-          <a:prstGeom prst="rect">
-            <a:avLst/>
-          </a:prstGeom>
-          <a:noFill/>
-        </p:spPr>
-        <p:txBody>
-          <a:bodyPr wrap="square">
-            <a:spAutoFit/>
-          </a:bodyPr>
-          <a:lstStyle/>
-          <a:p>
-            <a:pPr algn="ctr"/>
-            <a:r>
-              <a:rPr sz="4400" b="1" i="0">
-                <a:solidFill>
-                  <a:srgbClr val="FFFFFF"/>
-                </a:solidFill>
-                <a:latin typeface="Arial"/>
-              </a:rPr>
-              <a:t>いるものは</a:t>
-            </a:r>
-          </a:p>
-        </p:txBody>
-      </p:sp>
-      <p:sp>
-        <p:nvSpPr>
-          <p:cNvPr id="6" name="TextBox 5"/>
-          <p:cNvSpPr txBox="1"/>
-          <p:nvPr/>
-        </p:nvSpPr>
-        <p:spPr>
-          <a:xfrm>
-            <a:off x="594360" y="4251960"/>
-            <a:ext cx="11002975" cy="384048"/>
-          </a:xfrm>
-          <a:prstGeom prst="rect">
-            <a:avLst/>
-          </a:prstGeom>
-          <a:noFill/>
-        </p:spPr>
-        <p:txBody>
-          <a:bodyPr wrap="square">
-            <a:spAutoFit/>
-          </a:bodyPr>
-          <a:lstStyle/>
-          <a:p>
-            <a:pPr algn="ctr"/>
-            <a:r>
-              <a:rPr sz="2400" b="0" i="1">
-                <a:solidFill>
-                  <a:srgbClr val="B4B4B4"/>
-                </a:solidFill>
-                <a:latin typeface="Arial"/>
-              </a:rPr>
-              <a:t>iru mono ha</a:t>
+                  <a:srgbClr val="828282"/>
+                </a:solidFill>
+                <a:latin typeface="Arial"/>
+              </a:rPr>
+              <a:t>Que possa abençoar o Teu coração</a:t>
             </a:r>
           </a:p>
         </p:txBody>
@@ -7585,8 +7515,8 @@
         </p:nvSpPr>
         <p:spPr>
           <a:xfrm>
-            <a:off x="594360" y="4672584"/>
-            <a:ext cx="11002975" cy="347472"/>
+            <a:off x="640080" y="4896612"/>
+            <a:ext cx="10911535" cy="310896"/>
           </a:xfrm>
           <a:prstGeom prst="rect">
             <a:avLst/>
@@ -7603,11 +7533,11 @@
             <a:r>
               <a:rPr sz="2000" b="0" i="1">
                 <a:solidFill>
-                  <a:srgbClr val="8C8C8C"/>
-                </a:solidFill>
-                <a:latin typeface="Arial"/>
-              </a:rPr>
-              <a:t/>
+                  <a:srgbClr val="828282"/>
+                </a:solidFill>
+                <a:latin typeface="Arial"/>
+              </a:rPr>
+              <a:t>Trarei mais do que uma canção</a:t>
             </a:r>
           </a:p>
         </p:txBody>
@@ -7646,23 +7576,23 @@
         </p:nvSpPr>
         <p:spPr>
           <a:xfrm>
-            <a:off x="594360" y="1837944"/>
-            <a:ext cx="11002975" cy="685800"/>
-          </a:xfrm>
-          <a:prstGeom prst="rect">
-            <a:avLst/>
-          </a:prstGeom>
-          <a:noFill/>
-        </p:spPr>
-        <p:txBody>
-          <a:bodyPr wrap="square">
-            <a:spAutoFit/>
-          </a:bodyPr>
-          <a:lstStyle/>
-          <a:p>
-            <a:pPr algn="ctr"/>
-            <a:r>
-              <a:rPr sz="4400" b="1" i="0">
+            <a:off x="640080" y="1650492"/>
+            <a:ext cx="10911535" cy="731520"/>
+          </a:xfrm>
+          <a:prstGeom prst="rect">
+            <a:avLst/>
+          </a:prstGeom>
+          <a:noFill/>
+        </p:spPr>
+        <p:txBody>
+          <a:bodyPr wrap="square">
+            <a:spAutoFit/>
+          </a:bodyPr>
+          <a:lstStyle/>
+          <a:p>
+            <a:pPr algn="ctr"/>
+            <a:r>
+              <a:rPr sz="4800" b="1" i="0">
                 <a:solidFill>
                   <a:srgbClr val="FFFFFF"/>
                 </a:solidFill>
@@ -7681,8 +7611,8 @@
         </p:nvSpPr>
         <p:spPr>
           <a:xfrm>
-            <a:off x="594360" y="2560320"/>
-            <a:ext cx="11002975" cy="384048"/>
+            <a:off x="640080" y="2418588"/>
+            <a:ext cx="10911535" cy="365760"/>
           </a:xfrm>
           <a:prstGeom prst="rect">
             <a:avLst/>
@@ -7699,7 +7629,7 @@
             <a:r>
               <a:rPr sz="2400" b="0" i="1">
                 <a:solidFill>
-                  <a:srgbClr val="B4B4B4"/>
+                  <a:srgbClr val="AAAAAA"/>
                 </a:solidFill>
                 <a:latin typeface="Arial"/>
               </a:rPr>
@@ -7716,8 +7646,78 @@
         </p:nvSpPr>
         <p:spPr>
           <a:xfrm>
-            <a:off x="594360" y="2980944"/>
-            <a:ext cx="11002975" cy="347472"/>
+            <a:off x="640080" y="2985516"/>
+            <a:ext cx="10911535" cy="731520"/>
+          </a:xfrm>
+          <a:prstGeom prst="rect">
+            <a:avLst/>
+          </a:prstGeom>
+          <a:noFill/>
+        </p:spPr>
+        <p:txBody>
+          <a:bodyPr wrap="square">
+            <a:spAutoFit/>
+          </a:bodyPr>
+          <a:lstStyle/>
+          <a:p>
+            <a:pPr algn="ctr"/>
+            <a:r>
+              <a:rPr sz="4800" b="1" i="0">
+                <a:solidFill>
+                  <a:srgbClr val="FFFFFF"/>
+                </a:solidFill>
+                <a:latin typeface="Arial"/>
+              </a:rPr>
+              <a:t>わたし の こころ</a:t>
+            </a:r>
+          </a:p>
+        </p:txBody>
+      </p:sp>
+      <p:sp>
+        <p:nvSpPr>
+          <p:cNvPr id="5" name="TextBox 4"/>
+          <p:cNvSpPr txBox="1"/>
+          <p:nvPr/>
+        </p:nvSpPr>
+        <p:spPr>
+          <a:xfrm>
+            <a:off x="640080" y="3753612"/>
+            <a:ext cx="10911535" cy="365760"/>
+          </a:xfrm>
+          <a:prstGeom prst="rect">
+            <a:avLst/>
+          </a:prstGeom>
+          <a:noFill/>
+        </p:spPr>
+        <p:txBody>
+          <a:bodyPr wrap="square">
+            <a:spAutoFit/>
+          </a:bodyPr>
+          <a:lstStyle/>
+          <a:p>
+            <a:pPr algn="ctr"/>
+            <a:r>
+              <a:rPr sz="2400" b="0" i="1">
+                <a:solidFill>
+                  <a:srgbClr val="AAAAAA"/>
+                </a:solidFill>
+                <a:latin typeface="Arial"/>
+              </a:rPr>
+              <a:t>watashi no kokoro</a:t>
+            </a:r>
+          </a:p>
+        </p:txBody>
+      </p:sp>
+      <p:sp>
+        <p:nvSpPr>
+          <p:cNvPr id="6" name="TextBox 5"/>
+          <p:cNvSpPr txBox="1"/>
+          <p:nvPr/>
+        </p:nvSpPr>
+        <p:spPr>
+          <a:xfrm>
+            <a:off x="640080" y="4530852"/>
+            <a:ext cx="10911535" cy="310896"/>
           </a:xfrm>
           <a:prstGeom prst="rect">
             <a:avLst/>
@@ -7734,81 +7734,11 @@
             <a:r>
               <a:rPr sz="2000" b="0" i="1">
                 <a:solidFill>
-                  <a:srgbClr val="8C8C8C"/>
-                </a:solidFill>
-                <a:latin typeface="Arial"/>
-              </a:rPr>
-              <a:t/>
-            </a:r>
-          </a:p>
-        </p:txBody>
-      </p:sp>
-      <p:sp>
-        <p:nvSpPr>
-          <p:cNvPr id="5" name="TextBox 4"/>
-          <p:cNvSpPr txBox="1"/>
-          <p:nvPr/>
-        </p:nvSpPr>
-        <p:spPr>
-          <a:xfrm>
-            <a:off x="594360" y="3529584"/>
-            <a:ext cx="11002975" cy="685800"/>
-          </a:xfrm>
-          <a:prstGeom prst="rect">
-            <a:avLst/>
-          </a:prstGeom>
-          <a:noFill/>
-        </p:spPr>
-        <p:txBody>
-          <a:bodyPr wrap="square">
-            <a:spAutoFit/>
-          </a:bodyPr>
-          <a:lstStyle/>
-          <a:p>
-            <a:pPr algn="ctr"/>
-            <a:r>
-              <a:rPr sz="4400" b="1" i="0">
-                <a:solidFill>
-                  <a:srgbClr val="FFFFFF"/>
-                </a:solidFill>
-                <a:latin typeface="Arial"/>
-              </a:rPr>
-              <a:t>わたし の こころ</a:t>
-            </a:r>
-          </a:p>
-        </p:txBody>
-      </p:sp>
-      <p:sp>
-        <p:nvSpPr>
-          <p:cNvPr id="6" name="TextBox 5"/>
-          <p:cNvSpPr txBox="1"/>
-          <p:nvPr/>
-        </p:nvSpPr>
-        <p:spPr>
-          <a:xfrm>
-            <a:off x="594360" y="4251960"/>
-            <a:ext cx="11002975" cy="384048"/>
-          </a:xfrm>
-          <a:prstGeom prst="rect">
-            <a:avLst/>
-          </a:prstGeom>
-          <a:noFill/>
-        </p:spPr>
-        <p:txBody>
-          <a:bodyPr wrap="square">
-            <a:spAutoFit/>
-          </a:bodyPr>
-          <a:lstStyle/>
-          <a:p>
-            <a:pPr algn="ctr"/>
-            <a:r>
-              <a:rPr sz="2400" b="0" i="1">
-                <a:solidFill>
-                  <a:srgbClr val="B4B4B4"/>
-                </a:solidFill>
-                <a:latin typeface="Arial"/>
-              </a:rPr>
-              <a:t>watashi no kokoro</a:t>
+                  <a:srgbClr val="828282"/>
+                </a:solidFill>
+                <a:latin typeface="Arial"/>
+              </a:rPr>
+              <a:t>Pois a canção em si mesma</a:t>
             </a:r>
           </a:p>
         </p:txBody>
@@ -7821,8 +7751,8 @@
         </p:nvSpPr>
         <p:spPr>
           <a:xfrm>
-            <a:off x="594360" y="4672584"/>
-            <a:ext cx="11002975" cy="347472"/>
+            <a:off x="640080" y="4896612"/>
+            <a:ext cx="10911535" cy="310896"/>
           </a:xfrm>
           <a:prstGeom prst="rect">
             <a:avLst/>
@@ -7839,11 +7769,11 @@
             <a:r>
               <a:rPr sz="2000" b="0" i="1">
                 <a:solidFill>
-                  <a:srgbClr val="8C8C8C"/>
-                </a:solidFill>
-                <a:latin typeface="Arial"/>
-              </a:rPr>
-              <a:t/>
+                  <a:srgbClr val="828282"/>
+                </a:solidFill>
+                <a:latin typeface="Arial"/>
+              </a:rPr>
+              <a:t>Não é o que Tu necessitas</a:t>
             </a:r>
           </a:p>
         </p:txBody>
@@ -7882,23 +7812,23 @@
         </p:nvSpPr>
         <p:spPr>
           <a:xfrm>
-            <a:off x="594360" y="1837944"/>
-            <a:ext cx="11002975" cy="685800"/>
-          </a:xfrm>
-          <a:prstGeom prst="rect">
-            <a:avLst/>
-          </a:prstGeom>
-          <a:noFill/>
-        </p:spPr>
-        <p:txBody>
-          <a:bodyPr wrap="square">
-            <a:spAutoFit/>
-          </a:bodyPr>
-          <a:lstStyle/>
-          <a:p>
-            <a:pPr algn="ctr"/>
-            <a:r>
-              <a:rPr sz="4400" b="1" i="0">
+            <a:off x="640080" y="1650492"/>
+            <a:ext cx="10911535" cy="731520"/>
+          </a:xfrm>
+          <a:prstGeom prst="rect">
+            <a:avLst/>
+          </a:prstGeom>
+          <a:noFill/>
+        </p:spPr>
+        <p:txBody>
+          <a:bodyPr wrap="square">
+            <a:spAutoFit/>
+          </a:bodyPr>
+          <a:lstStyle/>
+          <a:p>
+            <a:pPr algn="ctr"/>
+            <a:r>
+              <a:rPr sz="4800" b="1" i="0">
                 <a:solidFill>
                   <a:srgbClr val="FFFFFF"/>
                 </a:solidFill>
@@ -7917,8 +7847,8 @@
         </p:nvSpPr>
         <p:spPr>
           <a:xfrm>
-            <a:off x="594360" y="2560320"/>
-            <a:ext cx="11002975" cy="384048"/>
+            <a:off x="640080" y="2418588"/>
+            <a:ext cx="10911535" cy="365760"/>
           </a:xfrm>
           <a:prstGeom prst="rect">
             <a:avLst/>
@@ -7935,7 +7865,7 @@
             <a:r>
               <a:rPr sz="2400" b="0" i="1">
                 <a:solidFill>
-                  <a:srgbClr val="B4B4B4"/>
+                  <a:srgbClr val="AAAAAA"/>
                 </a:solidFill>
                 <a:latin typeface="Arial"/>
               </a:rPr>
@@ -7952,8 +7882,78 @@
         </p:nvSpPr>
         <p:spPr>
           <a:xfrm>
-            <a:off x="594360" y="2980944"/>
-            <a:ext cx="11002975" cy="347472"/>
+            <a:off x="640080" y="2985516"/>
+            <a:ext cx="10911535" cy="731520"/>
+          </a:xfrm>
+          <a:prstGeom prst="rect">
+            <a:avLst/>
+          </a:prstGeom>
+          <a:noFill/>
+        </p:spPr>
+        <p:txBody>
+          <a:bodyPr wrap="square">
+            <a:spAutoFit/>
+          </a:bodyPr>
+          <a:lstStyle/>
+          <a:p>
+            <a:pPr algn="ctr"/>
+            <a:r>
+              <a:rPr sz="4800" b="1" i="0">
+                <a:solidFill>
+                  <a:srgbClr val="FFFFFF"/>
+                </a:solidFill>
+                <a:latin typeface="Arial"/>
+              </a:rPr>
+              <a:t>見 つ め て る か ら</a:t>
+            </a:r>
+          </a:p>
+        </p:txBody>
+      </p:sp>
+      <p:sp>
+        <p:nvSpPr>
+          <p:cNvPr id="5" name="TextBox 4"/>
+          <p:cNvSpPr txBox="1"/>
+          <p:nvPr/>
+        </p:nvSpPr>
+        <p:spPr>
+          <a:xfrm>
+            <a:off x="640080" y="3753612"/>
+            <a:ext cx="10911535" cy="365760"/>
+          </a:xfrm>
+          <a:prstGeom prst="rect">
+            <a:avLst/>
+          </a:prstGeom>
+          <a:noFill/>
+        </p:spPr>
+        <p:txBody>
+          <a:bodyPr wrap="square">
+            <a:spAutoFit/>
+          </a:bodyPr>
+          <a:lstStyle/>
+          <a:p>
+            <a:pPr algn="ctr"/>
+            <a:r>
+              <a:rPr sz="2400" b="0" i="1">
+                <a:solidFill>
+                  <a:srgbClr val="AAAAAA"/>
+                </a:solidFill>
+                <a:latin typeface="Arial"/>
+              </a:rPr>
+              <a:t>mitsumeteru kara</a:t>
+            </a:r>
+          </a:p>
+        </p:txBody>
+      </p:sp>
+      <p:sp>
+        <p:nvSpPr>
+          <p:cNvPr id="6" name="TextBox 5"/>
+          <p:cNvSpPr txBox="1"/>
+          <p:nvPr/>
+        </p:nvSpPr>
+        <p:spPr>
+          <a:xfrm>
+            <a:off x="640080" y="4530852"/>
+            <a:ext cx="10911535" cy="310896"/>
           </a:xfrm>
           <a:prstGeom prst="rect">
             <a:avLst/>
@@ -7970,81 +7970,11 @@
             <a:r>
               <a:rPr sz="2000" b="0" i="1">
                 <a:solidFill>
-                  <a:srgbClr val="8C8C8C"/>
-                </a:solidFill>
-                <a:latin typeface="Arial"/>
-              </a:rPr>
-              <a:t/>
-            </a:r>
-          </a:p>
-        </p:txBody>
-      </p:sp>
-      <p:sp>
-        <p:nvSpPr>
-          <p:cNvPr id="5" name="TextBox 4"/>
-          <p:cNvSpPr txBox="1"/>
-          <p:nvPr/>
-        </p:nvSpPr>
-        <p:spPr>
-          <a:xfrm>
-            <a:off x="594360" y="3529584"/>
-            <a:ext cx="11002975" cy="685800"/>
-          </a:xfrm>
-          <a:prstGeom prst="rect">
-            <a:avLst/>
-          </a:prstGeom>
-          <a:noFill/>
-        </p:spPr>
-        <p:txBody>
-          <a:bodyPr wrap="square">
-            <a:spAutoFit/>
-          </a:bodyPr>
-          <a:lstStyle/>
-          <a:p>
-            <a:pPr algn="ctr"/>
-            <a:r>
-              <a:rPr sz="4400" b="1" i="0">
-                <a:solidFill>
-                  <a:srgbClr val="FFFFFF"/>
-                </a:solidFill>
-                <a:latin typeface="Arial"/>
-              </a:rPr>
-              <a:t>見 つ め て る か ら</a:t>
-            </a:r>
-          </a:p>
-        </p:txBody>
-      </p:sp>
-      <p:sp>
-        <p:nvSpPr>
-          <p:cNvPr id="6" name="TextBox 5"/>
-          <p:cNvSpPr txBox="1"/>
-          <p:nvPr/>
-        </p:nvSpPr>
-        <p:spPr>
-          <a:xfrm>
-            <a:off x="594360" y="4251960"/>
-            <a:ext cx="11002975" cy="384048"/>
-          </a:xfrm>
-          <a:prstGeom prst="rect">
-            <a:avLst/>
-          </a:prstGeom>
-          <a:noFill/>
-        </p:spPr>
-        <p:txBody>
-          <a:bodyPr wrap="square">
-            <a:spAutoFit/>
-          </a:bodyPr>
-          <a:lstStyle/>
-          <a:p>
-            <a:pPr algn="ctr"/>
-            <a:r>
-              <a:rPr sz="2400" b="0" i="1">
-                <a:solidFill>
-                  <a:srgbClr val="B4B4B4"/>
-                </a:solidFill>
-                <a:latin typeface="Arial"/>
-              </a:rPr>
-              <a:t>mitsumeteru kara</a:t>
+                  <a:srgbClr val="828282"/>
+                </a:solidFill>
+                <a:latin typeface="Arial"/>
+              </a:rPr>
+              <a:t>Procuras muito mais fundo</a:t>
             </a:r>
           </a:p>
         </p:txBody>
@@ -8057,8 +7987,8 @@
         </p:nvSpPr>
         <p:spPr>
           <a:xfrm>
-            <a:off x="594360" y="4672584"/>
-            <a:ext cx="11002975" cy="347472"/>
+            <a:off x="640080" y="4896612"/>
+            <a:ext cx="10911535" cy="310896"/>
           </a:xfrm>
           <a:prstGeom prst="rect">
             <a:avLst/>
@@ -8075,11 +8005,11 @@
             <a:r>
               <a:rPr sz="2000" b="0" i="1">
                 <a:solidFill>
-                  <a:srgbClr val="8C8C8C"/>
-                </a:solidFill>
-                <a:latin typeface="Arial"/>
-              </a:rPr>
-              <a:t/>
+                  <a:srgbClr val="828282"/>
+                </a:solidFill>
+                <a:latin typeface="Arial"/>
+              </a:rPr>
+              <a:t>Através da aparência das coisas</a:t>
             </a:r>
           </a:p>
         </p:txBody>

--- a/output_pptx/The_Heart_Of_Worship.pptx
+++ b/output_pptx/The_Heart_Of_Worship.pptx
@@ -5930,6 +5930,76 @@
                 <a:latin typeface="Arial"/>
               </a:rPr>
               <a:t>Rei de infinito valor</a:t>
+            </a:r>
+          </a:p>
+        </p:txBody>
+      </p:sp>
+      <p:sp>
+        <p:nvSpPr>
+          <p:cNvPr id="4" name="TextBox 3"/>
+          <p:cNvSpPr txBox="1"/>
+          <p:nvPr/>
+        </p:nvSpPr>
+        <p:spPr>
+          <a:xfrm>
+            <a:off x="640080" y="4128516"/>
+            <a:ext cx="10911535" cy="310896"/>
+          </a:xfrm>
+          <a:prstGeom prst="rect">
+            <a:avLst/>
+          </a:prstGeom>
+          <a:noFill/>
+        </p:spPr>
+        <p:txBody>
+          <a:bodyPr wrap="square">
+            <a:spAutoFit/>
+          </a:bodyPr>
+          <a:lstStyle/>
+          <a:p>
+            <a:pPr algn="ctr"/>
+            <a:r>
+              <a:rPr sz="2000" b="0" i="0">
+                <a:solidFill>
+                  <a:srgbClr val="828282"/>
+                </a:solidFill>
+                <a:latin typeface="Arial"/>
+              </a:rPr>
+              <a:t>すべてはあなたについてだった、イエス</a:t>
+            </a:r>
+          </a:p>
+        </p:txBody>
+      </p:sp>
+      <p:sp>
+        <p:nvSpPr>
+          <p:cNvPr id="5" name="TextBox 4"/>
+          <p:cNvSpPr txBox="1"/>
+          <p:nvPr/>
+        </p:nvSpPr>
+        <p:spPr>
+          <a:xfrm>
+            <a:off x="640080" y="4494276"/>
+            <a:ext cx="10911535" cy="310896"/>
+          </a:xfrm>
+          <a:prstGeom prst="rect">
+            <a:avLst/>
+          </a:prstGeom>
+          <a:noFill/>
+        </p:spPr>
+        <p:txBody>
+          <a:bodyPr wrap="square">
+            <a:spAutoFit/>
+          </a:bodyPr>
+          <a:lstStyle/>
+          <a:p>
+            <a:pPr algn="ctr"/>
+            <a:r>
+              <a:rPr sz="2000" b="0" i="0">
+                <a:solidFill>
+                  <a:srgbClr val="828282"/>
+                </a:solidFill>
+                <a:latin typeface="Arial"/>
+              </a:rPr>
+              <a:t>無限の価値の王よ</a:t>
             </a:r>
           </a:p>
         </p:txBody>
